--- a/爆チャリ.pptx
+++ b/爆チャリ.pptx
@@ -6,7 +6,8 @@
   </p:sldMasterIdLst>
   <p:sldIdLst>
     <p:sldId id="256" r:id="rId2"/>
-    <p:sldId id="257" r:id="rId3"/>
+    <p:sldId id="258" r:id="rId3"/>
+    <p:sldId id="257" r:id="rId4"/>
   </p:sldIdLst>
   <p:sldSz cx="12192000" cy="6858000"/>
   <p:notesSz cx="6858000" cy="9144000"/>
@@ -105,6 +106,11 @@
       </a:defRPr>
     </a:lvl9pPr>
   </p:defaultTextStyle>
+  <p:extLst>
+    <p:ext uri="{EFAFB233-063F-42B5-8137-9DF3F51BA10A}">
+      <p15:sldGuideLst xmlns:p15="http://schemas.microsoft.com/office/powerpoint/2012/main"/>
+    </p:ext>
+  </p:extLst>
 </p:presentation>
 </file>
 
@@ -3269,8 +3275,12 @@
           <a:lstStyle/>
           <a:p>
             <a:r>
-              <a:rPr lang="ja-JP" altLang="en-US" dirty="0"/>
-              <a:t>横スクロールアクション</a:t>
+              <a:rPr lang="ja-JP" altLang="en-US" dirty="0" smtClean="0"/>
+              <a:t>爆走チャリンコ</a:t>
+            </a:r>
+            <a:r>
+              <a:rPr lang="ja-JP" altLang="en-US" sz="3600" dirty="0" smtClean="0"/>
+              <a:t>（爆チャリ）</a:t>
             </a:r>
             <a:endParaRPr kumimoji="1" lang="ja-JP" altLang="en-US" dirty="0"/>
           </a:p>
@@ -3299,6 +3309,36 @@
           </a:p>
         </p:txBody>
       </p:sp>
+      <p:pic>
+        <p:nvPicPr>
+          <p:cNvPr id="4" name="図 3"/>
+          <p:cNvPicPr>
+            <a:picLocks noChangeAspect="1"/>
+          </p:cNvPicPr>
+          <p:nvPr/>
+        </p:nvPicPr>
+        <p:blipFill>
+          <a:blip r:embed="rId2">
+            <a:extLst>
+              <a:ext uri="{28A0092B-C50C-407E-A947-70E740481C1C}">
+                <a14:useLocalDpi xmlns:a14="http://schemas.microsoft.com/office/drawing/2010/main" val="0"/>
+              </a:ext>
+            </a:extLst>
+          </a:blip>
+          <a:stretch>
+            <a:fillRect/>
+          </a:stretch>
+        </p:blipFill>
+        <p:spPr>
+          <a:xfrm>
+            <a:off x="8029793" y="3397540"/>
+            <a:ext cx="2979822" cy="3376569"/>
+          </a:xfrm>
+          <a:prstGeom prst="rect">
+            <a:avLst/>
+          </a:prstGeom>
+        </p:spPr>
+      </p:pic>
     </p:spTree>
     <p:extLst>
       <p:ext uri="{BB962C8B-B14F-4D97-AF65-F5344CB8AC3E}">
@@ -3339,6 +3379,164 @@
             <p:ph type="title"/>
           </p:nvPr>
         </p:nvSpPr>
+        <p:spPr>
+          <a:xfrm>
+            <a:off x="427140" y="239290"/>
+            <a:ext cx="10515600" cy="1325563"/>
+          </a:xfrm>
+        </p:spPr>
+        <p:txBody>
+          <a:bodyPr>
+            <a:normAutofit/>
+          </a:bodyPr>
+          <a:lstStyle/>
+          <a:p>
+            <a:r>
+              <a:rPr kumimoji="1" lang="ja-JP" altLang="en-US" sz="7200" dirty="0" smtClean="0"/>
+              <a:t>ゲーム概要</a:t>
+            </a:r>
+            <a:endParaRPr kumimoji="1" lang="ja-JP" altLang="en-US" sz="7200" dirty="0"/>
+          </a:p>
+        </p:txBody>
+      </p:sp>
+      <p:sp>
+        <p:nvSpPr>
+          <p:cNvPr id="3" name="コンテンツ プレースホルダー 2"/>
+          <p:cNvSpPr>
+            <a:spLocks noGrp="1"/>
+          </p:cNvSpPr>
+          <p:nvPr>
+            <p:ph idx="1"/>
+          </p:nvPr>
+        </p:nvSpPr>
+        <p:spPr>
+          <a:xfrm>
+            <a:off x="578141" y="1792069"/>
+            <a:ext cx="10515600" cy="4351338"/>
+          </a:xfrm>
+        </p:spPr>
+        <p:txBody>
+          <a:bodyPr>
+            <a:normAutofit/>
+          </a:bodyPr>
+          <a:lstStyle/>
+          <a:p>
+            <a:pPr marL="0" indent="0">
+              <a:buNone/>
+            </a:pPr>
+            <a:r>
+              <a:rPr kumimoji="1" lang="ja-JP" altLang="en-US" sz="4400" dirty="0" smtClean="0"/>
+              <a:t>ジャンル：アクション</a:t>
+            </a:r>
+            <a:endParaRPr kumimoji="1" lang="en-US" altLang="ja-JP" sz="4400" dirty="0" smtClean="0"/>
+          </a:p>
+          <a:p>
+            <a:pPr marL="0" indent="0">
+              <a:buNone/>
+            </a:pPr>
+            <a:r>
+              <a:rPr kumimoji="1" lang="ja-JP" altLang="en-US" sz="4400" dirty="0" smtClean="0"/>
+              <a:t>開発環境：</a:t>
+            </a:r>
+            <a:r>
+              <a:rPr kumimoji="1" lang="en-US" altLang="ja-JP" sz="4400" dirty="0" smtClean="0"/>
+              <a:t>Unity</a:t>
+            </a:r>
+          </a:p>
+          <a:p>
+            <a:pPr marL="0" indent="0">
+              <a:buNone/>
+            </a:pPr>
+            <a:r>
+              <a:rPr lang="ja-JP" altLang="en-US" sz="4400" dirty="0"/>
+              <a:t>プレイ</a:t>
+            </a:r>
+            <a:r>
+              <a:rPr lang="ja-JP" altLang="en-US" sz="4400" dirty="0" smtClean="0"/>
+              <a:t>人数：</a:t>
+            </a:r>
+            <a:r>
+              <a:rPr lang="en-US" altLang="ja-JP" sz="4400" dirty="0" smtClean="0"/>
+              <a:t>1</a:t>
+            </a:r>
+            <a:r>
+              <a:rPr lang="ja-JP" altLang="en-US" sz="4400" dirty="0" smtClean="0"/>
+              <a:t>人</a:t>
+            </a:r>
+            <a:endParaRPr lang="en-US" altLang="ja-JP" sz="4400" dirty="0" smtClean="0"/>
+          </a:p>
+        </p:txBody>
+      </p:sp>
+      <p:pic>
+        <p:nvPicPr>
+          <p:cNvPr id="4" name="図 3"/>
+          <p:cNvPicPr>
+            <a:picLocks noChangeAspect="1"/>
+          </p:cNvPicPr>
+          <p:nvPr/>
+        </p:nvPicPr>
+        <p:blipFill>
+          <a:blip r:embed="rId2">
+            <a:extLst>
+              <a:ext uri="{28A0092B-C50C-407E-A947-70E740481C1C}">
+                <a14:useLocalDpi xmlns:a14="http://schemas.microsoft.com/office/drawing/2010/main" val="0"/>
+              </a:ext>
+            </a:extLst>
+          </a:blip>
+          <a:stretch>
+            <a:fillRect/>
+          </a:stretch>
+        </p:blipFill>
+        <p:spPr>
+          <a:xfrm>
+            <a:off x="8029793" y="3397540"/>
+            <a:ext cx="2979822" cy="3376569"/>
+          </a:xfrm>
+          <a:prstGeom prst="rect">
+            <a:avLst/>
+          </a:prstGeom>
+        </p:spPr>
+      </p:pic>
+    </p:spTree>
+    <p:extLst>
+      <p:ext uri="{BB962C8B-B14F-4D97-AF65-F5344CB8AC3E}">
+        <p14:creationId xmlns:p14="http://schemas.microsoft.com/office/powerpoint/2010/main" val="1401241664"/>
+      </p:ext>
+    </p:extLst>
+  </p:cSld>
+  <p:clrMapOvr>
+    <a:masterClrMapping/>
+  </p:clrMapOvr>
+</p:sld>
+</file>
+
+<file path=ppt/slides/slide3.xml><?xml version="1.0" encoding="utf-8"?>
+<p:sld xmlns:a="http://schemas.openxmlformats.org/drawingml/2006/main" xmlns:r="http://schemas.openxmlformats.org/officeDocument/2006/relationships" xmlns:p="http://schemas.openxmlformats.org/presentationml/2006/main">
+  <p:cSld>
+    <p:spTree>
+      <p:nvGrpSpPr>
+        <p:cNvPr id="1" name=""/>
+        <p:cNvGrpSpPr/>
+        <p:nvPr/>
+      </p:nvGrpSpPr>
+      <p:grpSpPr>
+        <a:xfrm>
+          <a:off x="0" y="0"/>
+          <a:ext cx="0" cy="0"/>
+          <a:chOff x="0" y="0"/>
+          <a:chExt cx="0" cy="0"/>
+        </a:xfrm>
+      </p:grpSpPr>
+      <p:sp>
+        <p:nvSpPr>
+          <p:cNvPr id="2" name="タイトル 1"/>
+          <p:cNvSpPr>
+            <a:spLocks noGrp="1"/>
+          </p:cNvSpPr>
+          <p:nvPr>
+            <p:ph type="title"/>
+          </p:nvPr>
+        </p:nvSpPr>
         <p:spPr/>
         <p:txBody>
           <a:bodyPr/>
@@ -3369,7 +3567,26 @@
           <a:p>
             <a:r>
               <a:rPr kumimoji="1" lang="ja-JP" altLang="en-US" dirty="0" smtClean="0"/>
-              <a:t>プレイヤーの体が軟体</a:t>
+              <a:t>自転車に乗りながらゴールを目指す</a:t>
+            </a:r>
+            <a:endParaRPr kumimoji="1" lang="en-US" altLang="ja-JP" dirty="0" smtClean="0"/>
+          </a:p>
+          <a:p>
+            <a:r>
+              <a:rPr kumimoji="1" lang="ja-JP" altLang="en-US" dirty="0" smtClean="0"/>
+              <a:t>プレイヤー</a:t>
+            </a:r>
+            <a:r>
+              <a:rPr kumimoji="1" lang="ja-JP" altLang="en-US" dirty="0" smtClean="0"/>
+              <a:t>の体</a:t>
+            </a:r>
+            <a:r>
+              <a:rPr kumimoji="1" lang="ja-JP" altLang="en-US" dirty="0" smtClean="0"/>
+              <a:t>が</a:t>
+            </a:r>
+            <a:r>
+              <a:rPr lang="ja-JP" altLang="en-US" dirty="0"/>
+              <a:t>ふにゃふにゃ</a:t>
             </a:r>
             <a:endParaRPr kumimoji="1" lang="en-US" altLang="ja-JP" dirty="0" smtClean="0"/>
           </a:p>
@@ -3402,6 +3619,36 @@
           </a:p>
         </p:txBody>
       </p:sp>
+      <p:pic>
+        <p:nvPicPr>
+          <p:cNvPr id="4" name="図 3"/>
+          <p:cNvPicPr>
+            <a:picLocks noChangeAspect="1"/>
+          </p:cNvPicPr>
+          <p:nvPr/>
+        </p:nvPicPr>
+        <p:blipFill>
+          <a:blip r:embed="rId2">
+            <a:extLst>
+              <a:ext uri="{28A0092B-C50C-407E-A947-70E740481C1C}">
+                <a14:useLocalDpi xmlns:a14="http://schemas.microsoft.com/office/drawing/2010/main" val="0"/>
+              </a:ext>
+            </a:extLst>
+          </a:blip>
+          <a:stretch>
+            <a:fillRect/>
+          </a:stretch>
+        </p:blipFill>
+        <p:spPr>
+          <a:xfrm>
+            <a:off x="8029793" y="3397540"/>
+            <a:ext cx="2979822" cy="3376569"/>
+          </a:xfrm>
+          <a:prstGeom prst="rect">
+            <a:avLst/>
+          </a:prstGeom>
+        </p:spPr>
+      </p:pic>
     </p:spTree>
     <p:extLst>
       <p:ext uri="{BB962C8B-B14F-4D97-AF65-F5344CB8AC3E}">

--- a/爆チャリ.pptx
+++ b/爆チャリ.pptx
@@ -3544,7 +3544,7 @@
           <a:p>
             <a:r>
               <a:rPr kumimoji="1" lang="ja-JP" altLang="en-US" dirty="0" smtClean="0"/>
-              <a:t>特徴</a:t>
+              <a:t>ゲーム説明</a:t>
             </a:r>
             <a:endParaRPr kumimoji="1" lang="ja-JP" altLang="en-US" dirty="0"/>
           </a:p>
@@ -3574,15 +3574,7 @@
           <a:p>
             <a:r>
               <a:rPr kumimoji="1" lang="ja-JP" altLang="en-US" dirty="0" smtClean="0"/>
-              <a:t>プレイヤー</a:t>
-            </a:r>
-            <a:r>
-              <a:rPr kumimoji="1" lang="ja-JP" altLang="en-US" dirty="0" smtClean="0"/>
-              <a:t>の体</a:t>
-            </a:r>
-            <a:r>
-              <a:rPr kumimoji="1" lang="ja-JP" altLang="en-US" dirty="0" smtClean="0"/>
-              <a:t>が</a:t>
+              <a:t>プレイヤーの体が</a:t>
             </a:r>
             <a:r>
               <a:rPr lang="ja-JP" altLang="en-US" dirty="0"/>

--- a/爆チャリ.pptx
+++ b/爆チャリ.pptx
@@ -156,10 +156,9 @@
           </a:lstStyle>
           <a:p>
             <a:r>
-              <a:rPr kumimoji="1" lang="ja-JP" altLang="en-US" smtClean="0"/>
+              <a:rPr kumimoji="1" lang="ja-JP" altLang="en-US"/>
               <a:t>マスター タイトルの書式設定</a:t>
             </a:r>
-            <a:endParaRPr kumimoji="1" lang="ja-JP" altLang="en-US"/>
           </a:p>
         </p:txBody>
       </p:sp>
@@ -221,10 +220,9 @@
           </a:lstStyle>
           <a:p>
             <a:r>
-              <a:rPr kumimoji="1" lang="ja-JP" altLang="en-US" smtClean="0"/>
+              <a:rPr kumimoji="1" lang="ja-JP" altLang="en-US"/>
               <a:t>マスター サブタイトルの書式設定</a:t>
             </a:r>
-            <a:endParaRPr kumimoji="1" lang="ja-JP" altLang="en-US"/>
           </a:p>
         </p:txBody>
       </p:sp>
@@ -245,7 +243,7 @@
           <a:p>
             <a:fld id="{B0A8AC16-9C99-4DAF-B857-3E0C6295AE9F}" type="datetimeFigureOut">
               <a:rPr kumimoji="1" lang="ja-JP" altLang="en-US" smtClean="0"/>
-              <a:t>2026/4/13</a:t>
+              <a:t>2026/4/17</a:t>
             </a:fld>
             <a:endParaRPr kumimoji="1" lang="ja-JP" altLang="en-US"/>
           </a:p>
@@ -339,10 +337,9 @@
           <a:lstStyle/>
           <a:p>
             <a:r>
-              <a:rPr kumimoji="1" lang="ja-JP" altLang="en-US" smtClean="0"/>
+              <a:rPr kumimoji="1" lang="ja-JP" altLang="en-US"/>
               <a:t>マスター タイトルの書式設定</a:t>
             </a:r>
-            <a:endParaRPr kumimoji="1" lang="ja-JP" altLang="en-US"/>
           </a:p>
         </p:txBody>
       </p:sp>
@@ -363,70 +360,69 @@
           <a:p>
             <a:pPr lvl="0"/>
             <a:r>
-              <a:rPr kumimoji="1" lang="ja-JP" altLang="en-US" smtClean="0"/>
+              <a:rPr kumimoji="1" lang="ja-JP" altLang="en-US"/>
               <a:t>マスター テキストの書式設定</a:t>
             </a:r>
           </a:p>
           <a:p>
             <a:pPr lvl="1"/>
             <a:r>
-              <a:rPr kumimoji="1" lang="ja-JP" altLang="en-US" smtClean="0"/>
+              <a:rPr kumimoji="1" lang="ja-JP" altLang="en-US"/>
               <a:t>第 </a:t>
             </a:r>
             <a:r>
-              <a:rPr kumimoji="1" lang="en-US" altLang="ja-JP" smtClean="0"/>
+              <a:rPr kumimoji="1" lang="en-US" altLang="ja-JP"/>
               <a:t>2 </a:t>
             </a:r>
             <a:r>
-              <a:rPr kumimoji="1" lang="ja-JP" altLang="en-US" smtClean="0"/>
+              <a:rPr kumimoji="1" lang="ja-JP" altLang="en-US"/>
               <a:t>レベル</a:t>
             </a:r>
           </a:p>
           <a:p>
             <a:pPr lvl="2"/>
             <a:r>
-              <a:rPr kumimoji="1" lang="ja-JP" altLang="en-US" smtClean="0"/>
+              <a:rPr kumimoji="1" lang="ja-JP" altLang="en-US"/>
               <a:t>第 </a:t>
             </a:r>
             <a:r>
-              <a:rPr kumimoji="1" lang="en-US" altLang="ja-JP" smtClean="0"/>
+              <a:rPr kumimoji="1" lang="en-US" altLang="ja-JP"/>
               <a:t>3 </a:t>
             </a:r>
             <a:r>
-              <a:rPr kumimoji="1" lang="ja-JP" altLang="en-US" smtClean="0"/>
+              <a:rPr kumimoji="1" lang="ja-JP" altLang="en-US"/>
               <a:t>レベル</a:t>
             </a:r>
           </a:p>
           <a:p>
             <a:pPr lvl="3"/>
             <a:r>
-              <a:rPr kumimoji="1" lang="ja-JP" altLang="en-US" smtClean="0"/>
+              <a:rPr kumimoji="1" lang="ja-JP" altLang="en-US"/>
               <a:t>第 </a:t>
             </a:r>
             <a:r>
-              <a:rPr kumimoji="1" lang="en-US" altLang="ja-JP" smtClean="0"/>
+              <a:rPr kumimoji="1" lang="en-US" altLang="ja-JP"/>
               <a:t>4 </a:t>
             </a:r>
             <a:r>
-              <a:rPr kumimoji="1" lang="ja-JP" altLang="en-US" smtClean="0"/>
+              <a:rPr kumimoji="1" lang="ja-JP" altLang="en-US"/>
               <a:t>レベル</a:t>
             </a:r>
           </a:p>
           <a:p>
             <a:pPr lvl="4"/>
             <a:r>
-              <a:rPr kumimoji="1" lang="ja-JP" altLang="en-US" smtClean="0"/>
+              <a:rPr kumimoji="1" lang="ja-JP" altLang="en-US"/>
               <a:t>第 </a:t>
             </a:r>
             <a:r>
-              <a:rPr kumimoji="1" lang="en-US" altLang="ja-JP" smtClean="0"/>
+              <a:rPr kumimoji="1" lang="en-US" altLang="ja-JP"/>
               <a:t>5 </a:t>
             </a:r>
             <a:r>
-              <a:rPr kumimoji="1" lang="ja-JP" altLang="en-US" smtClean="0"/>
+              <a:rPr kumimoji="1" lang="ja-JP" altLang="en-US"/>
               <a:t>レベル</a:t>
             </a:r>
-            <a:endParaRPr kumimoji="1" lang="ja-JP" altLang="en-US"/>
           </a:p>
         </p:txBody>
       </p:sp>
@@ -447,7 +443,7 @@
           <a:p>
             <a:fld id="{B0A8AC16-9C99-4DAF-B857-3E0C6295AE9F}" type="datetimeFigureOut">
               <a:rPr kumimoji="1" lang="ja-JP" altLang="en-US" smtClean="0"/>
-              <a:t>2026/4/13</a:t>
+              <a:t>2026/4/17</a:t>
             </a:fld>
             <a:endParaRPr kumimoji="1" lang="ja-JP" altLang="en-US"/>
           </a:p>
@@ -546,10 +542,9 @@
           <a:lstStyle/>
           <a:p>
             <a:r>
-              <a:rPr kumimoji="1" lang="ja-JP" altLang="en-US" smtClean="0"/>
+              <a:rPr kumimoji="1" lang="ja-JP" altLang="en-US"/>
               <a:t>マスター タイトルの書式設定</a:t>
             </a:r>
-            <a:endParaRPr kumimoji="1" lang="ja-JP" altLang="en-US"/>
           </a:p>
         </p:txBody>
       </p:sp>
@@ -575,70 +570,69 @@
           <a:p>
             <a:pPr lvl="0"/>
             <a:r>
-              <a:rPr kumimoji="1" lang="ja-JP" altLang="en-US" smtClean="0"/>
+              <a:rPr kumimoji="1" lang="ja-JP" altLang="en-US"/>
               <a:t>マスター テキストの書式設定</a:t>
             </a:r>
           </a:p>
           <a:p>
             <a:pPr lvl="1"/>
             <a:r>
-              <a:rPr kumimoji="1" lang="ja-JP" altLang="en-US" smtClean="0"/>
+              <a:rPr kumimoji="1" lang="ja-JP" altLang="en-US"/>
               <a:t>第 </a:t>
             </a:r>
             <a:r>
-              <a:rPr kumimoji="1" lang="en-US" altLang="ja-JP" smtClean="0"/>
+              <a:rPr kumimoji="1" lang="en-US" altLang="ja-JP"/>
               <a:t>2 </a:t>
             </a:r>
             <a:r>
-              <a:rPr kumimoji="1" lang="ja-JP" altLang="en-US" smtClean="0"/>
+              <a:rPr kumimoji="1" lang="ja-JP" altLang="en-US"/>
               <a:t>レベル</a:t>
             </a:r>
           </a:p>
           <a:p>
             <a:pPr lvl="2"/>
             <a:r>
-              <a:rPr kumimoji="1" lang="ja-JP" altLang="en-US" smtClean="0"/>
+              <a:rPr kumimoji="1" lang="ja-JP" altLang="en-US"/>
               <a:t>第 </a:t>
             </a:r>
             <a:r>
-              <a:rPr kumimoji="1" lang="en-US" altLang="ja-JP" smtClean="0"/>
+              <a:rPr kumimoji="1" lang="en-US" altLang="ja-JP"/>
               <a:t>3 </a:t>
             </a:r>
             <a:r>
-              <a:rPr kumimoji="1" lang="ja-JP" altLang="en-US" smtClean="0"/>
+              <a:rPr kumimoji="1" lang="ja-JP" altLang="en-US"/>
               <a:t>レベル</a:t>
             </a:r>
           </a:p>
           <a:p>
             <a:pPr lvl="3"/>
             <a:r>
-              <a:rPr kumimoji="1" lang="ja-JP" altLang="en-US" smtClean="0"/>
+              <a:rPr kumimoji="1" lang="ja-JP" altLang="en-US"/>
               <a:t>第 </a:t>
             </a:r>
             <a:r>
-              <a:rPr kumimoji="1" lang="en-US" altLang="ja-JP" smtClean="0"/>
+              <a:rPr kumimoji="1" lang="en-US" altLang="ja-JP"/>
               <a:t>4 </a:t>
             </a:r>
             <a:r>
-              <a:rPr kumimoji="1" lang="ja-JP" altLang="en-US" smtClean="0"/>
+              <a:rPr kumimoji="1" lang="ja-JP" altLang="en-US"/>
               <a:t>レベル</a:t>
             </a:r>
           </a:p>
           <a:p>
             <a:pPr lvl="4"/>
             <a:r>
-              <a:rPr kumimoji="1" lang="ja-JP" altLang="en-US" smtClean="0"/>
+              <a:rPr kumimoji="1" lang="ja-JP" altLang="en-US"/>
               <a:t>第 </a:t>
             </a:r>
             <a:r>
-              <a:rPr kumimoji="1" lang="en-US" altLang="ja-JP" smtClean="0"/>
+              <a:rPr kumimoji="1" lang="en-US" altLang="ja-JP"/>
               <a:t>5 </a:t>
             </a:r>
             <a:r>
-              <a:rPr kumimoji="1" lang="ja-JP" altLang="en-US" smtClean="0"/>
+              <a:rPr kumimoji="1" lang="ja-JP" altLang="en-US"/>
               <a:t>レベル</a:t>
             </a:r>
-            <a:endParaRPr kumimoji="1" lang="ja-JP" altLang="en-US"/>
           </a:p>
         </p:txBody>
       </p:sp>
@@ -659,7 +653,7 @@
           <a:p>
             <a:fld id="{B0A8AC16-9C99-4DAF-B857-3E0C6295AE9F}" type="datetimeFigureOut">
               <a:rPr kumimoji="1" lang="ja-JP" altLang="en-US" smtClean="0"/>
-              <a:t>2026/4/13</a:t>
+              <a:t>2026/4/17</a:t>
             </a:fld>
             <a:endParaRPr kumimoji="1" lang="ja-JP" altLang="en-US"/>
           </a:p>
@@ -753,10 +747,9 @@
           <a:lstStyle/>
           <a:p>
             <a:r>
-              <a:rPr kumimoji="1" lang="ja-JP" altLang="en-US" smtClean="0"/>
+              <a:rPr kumimoji="1" lang="ja-JP" altLang="en-US"/>
               <a:t>マスター タイトルの書式設定</a:t>
             </a:r>
-            <a:endParaRPr kumimoji="1" lang="ja-JP" altLang="en-US"/>
           </a:p>
         </p:txBody>
       </p:sp>
@@ -777,70 +770,69 @@
           <a:p>
             <a:pPr lvl="0"/>
             <a:r>
-              <a:rPr kumimoji="1" lang="ja-JP" altLang="en-US" smtClean="0"/>
+              <a:rPr kumimoji="1" lang="ja-JP" altLang="en-US"/>
               <a:t>マスター テキストの書式設定</a:t>
             </a:r>
           </a:p>
           <a:p>
             <a:pPr lvl="1"/>
             <a:r>
-              <a:rPr kumimoji="1" lang="ja-JP" altLang="en-US" smtClean="0"/>
+              <a:rPr kumimoji="1" lang="ja-JP" altLang="en-US"/>
               <a:t>第 </a:t>
             </a:r>
             <a:r>
-              <a:rPr kumimoji="1" lang="en-US" altLang="ja-JP" smtClean="0"/>
+              <a:rPr kumimoji="1" lang="en-US" altLang="ja-JP"/>
               <a:t>2 </a:t>
             </a:r>
             <a:r>
-              <a:rPr kumimoji="1" lang="ja-JP" altLang="en-US" smtClean="0"/>
+              <a:rPr kumimoji="1" lang="ja-JP" altLang="en-US"/>
               <a:t>レベル</a:t>
             </a:r>
           </a:p>
           <a:p>
             <a:pPr lvl="2"/>
             <a:r>
-              <a:rPr kumimoji="1" lang="ja-JP" altLang="en-US" smtClean="0"/>
+              <a:rPr kumimoji="1" lang="ja-JP" altLang="en-US"/>
               <a:t>第 </a:t>
             </a:r>
             <a:r>
-              <a:rPr kumimoji="1" lang="en-US" altLang="ja-JP" smtClean="0"/>
+              <a:rPr kumimoji="1" lang="en-US" altLang="ja-JP"/>
               <a:t>3 </a:t>
             </a:r>
             <a:r>
-              <a:rPr kumimoji="1" lang="ja-JP" altLang="en-US" smtClean="0"/>
+              <a:rPr kumimoji="1" lang="ja-JP" altLang="en-US"/>
               <a:t>レベル</a:t>
             </a:r>
           </a:p>
           <a:p>
             <a:pPr lvl="3"/>
             <a:r>
-              <a:rPr kumimoji="1" lang="ja-JP" altLang="en-US" smtClean="0"/>
+              <a:rPr kumimoji="1" lang="ja-JP" altLang="en-US"/>
               <a:t>第 </a:t>
             </a:r>
             <a:r>
-              <a:rPr kumimoji="1" lang="en-US" altLang="ja-JP" smtClean="0"/>
+              <a:rPr kumimoji="1" lang="en-US" altLang="ja-JP"/>
               <a:t>4 </a:t>
             </a:r>
             <a:r>
-              <a:rPr kumimoji="1" lang="ja-JP" altLang="en-US" smtClean="0"/>
+              <a:rPr kumimoji="1" lang="ja-JP" altLang="en-US"/>
               <a:t>レベル</a:t>
             </a:r>
           </a:p>
           <a:p>
             <a:pPr lvl="4"/>
             <a:r>
-              <a:rPr kumimoji="1" lang="ja-JP" altLang="en-US" smtClean="0"/>
+              <a:rPr kumimoji="1" lang="ja-JP" altLang="en-US"/>
               <a:t>第 </a:t>
             </a:r>
             <a:r>
-              <a:rPr kumimoji="1" lang="en-US" altLang="ja-JP" smtClean="0"/>
+              <a:rPr kumimoji="1" lang="en-US" altLang="ja-JP"/>
               <a:t>5 </a:t>
             </a:r>
             <a:r>
-              <a:rPr kumimoji="1" lang="ja-JP" altLang="en-US" smtClean="0"/>
+              <a:rPr kumimoji="1" lang="ja-JP" altLang="en-US"/>
               <a:t>レベル</a:t>
             </a:r>
-            <a:endParaRPr kumimoji="1" lang="ja-JP" altLang="en-US"/>
           </a:p>
         </p:txBody>
       </p:sp>
@@ -861,7 +853,7 @@
           <a:p>
             <a:fld id="{B0A8AC16-9C99-4DAF-B857-3E0C6295AE9F}" type="datetimeFigureOut">
               <a:rPr kumimoji="1" lang="ja-JP" altLang="en-US" smtClean="0"/>
-              <a:t>2026/4/13</a:t>
+              <a:t>2026/4/17</a:t>
             </a:fld>
             <a:endParaRPr kumimoji="1" lang="ja-JP" altLang="en-US"/>
           </a:p>
@@ -964,10 +956,9 @@
           </a:lstStyle>
           <a:p>
             <a:r>
-              <a:rPr kumimoji="1" lang="ja-JP" altLang="en-US" smtClean="0"/>
+              <a:rPr kumimoji="1" lang="ja-JP" altLang="en-US"/>
               <a:t>マスター タイトルの書式設定</a:t>
             </a:r>
-            <a:endParaRPr kumimoji="1" lang="ja-JP" altLang="en-US"/>
           </a:p>
         </p:txBody>
       </p:sp>
@@ -1084,7 +1075,7 @@
           <a:p>
             <a:pPr lvl="0"/>
             <a:r>
-              <a:rPr kumimoji="1" lang="ja-JP" altLang="en-US" smtClean="0"/>
+              <a:rPr kumimoji="1" lang="ja-JP" altLang="en-US"/>
               <a:t>マスター テキストの書式設定</a:t>
             </a:r>
           </a:p>
@@ -1107,7 +1098,7 @@
           <a:p>
             <a:fld id="{B0A8AC16-9C99-4DAF-B857-3E0C6295AE9F}" type="datetimeFigureOut">
               <a:rPr kumimoji="1" lang="ja-JP" altLang="en-US" smtClean="0"/>
-              <a:t>2026/4/13</a:t>
+              <a:t>2026/4/17</a:t>
             </a:fld>
             <a:endParaRPr kumimoji="1" lang="ja-JP" altLang="en-US"/>
           </a:p>
@@ -1201,10 +1192,9 @@
           <a:lstStyle/>
           <a:p>
             <a:r>
-              <a:rPr kumimoji="1" lang="ja-JP" altLang="en-US" smtClean="0"/>
+              <a:rPr kumimoji="1" lang="ja-JP" altLang="en-US"/>
               <a:t>マスター タイトルの書式設定</a:t>
             </a:r>
-            <a:endParaRPr kumimoji="1" lang="ja-JP" altLang="en-US"/>
           </a:p>
         </p:txBody>
       </p:sp>
@@ -1230,70 +1220,69 @@
           <a:p>
             <a:pPr lvl="0"/>
             <a:r>
-              <a:rPr kumimoji="1" lang="ja-JP" altLang="en-US" smtClean="0"/>
+              <a:rPr kumimoji="1" lang="ja-JP" altLang="en-US"/>
               <a:t>マスター テキストの書式設定</a:t>
             </a:r>
           </a:p>
           <a:p>
             <a:pPr lvl="1"/>
             <a:r>
-              <a:rPr kumimoji="1" lang="ja-JP" altLang="en-US" smtClean="0"/>
+              <a:rPr kumimoji="1" lang="ja-JP" altLang="en-US"/>
               <a:t>第 </a:t>
             </a:r>
             <a:r>
-              <a:rPr kumimoji="1" lang="en-US" altLang="ja-JP" smtClean="0"/>
+              <a:rPr kumimoji="1" lang="en-US" altLang="ja-JP"/>
               <a:t>2 </a:t>
             </a:r>
             <a:r>
-              <a:rPr kumimoji="1" lang="ja-JP" altLang="en-US" smtClean="0"/>
+              <a:rPr kumimoji="1" lang="ja-JP" altLang="en-US"/>
               <a:t>レベル</a:t>
             </a:r>
           </a:p>
           <a:p>
             <a:pPr lvl="2"/>
             <a:r>
-              <a:rPr kumimoji="1" lang="ja-JP" altLang="en-US" smtClean="0"/>
+              <a:rPr kumimoji="1" lang="ja-JP" altLang="en-US"/>
               <a:t>第 </a:t>
             </a:r>
             <a:r>
-              <a:rPr kumimoji="1" lang="en-US" altLang="ja-JP" smtClean="0"/>
+              <a:rPr kumimoji="1" lang="en-US" altLang="ja-JP"/>
               <a:t>3 </a:t>
             </a:r>
             <a:r>
-              <a:rPr kumimoji="1" lang="ja-JP" altLang="en-US" smtClean="0"/>
+              <a:rPr kumimoji="1" lang="ja-JP" altLang="en-US"/>
               <a:t>レベル</a:t>
             </a:r>
           </a:p>
           <a:p>
             <a:pPr lvl="3"/>
             <a:r>
-              <a:rPr kumimoji="1" lang="ja-JP" altLang="en-US" smtClean="0"/>
+              <a:rPr kumimoji="1" lang="ja-JP" altLang="en-US"/>
               <a:t>第 </a:t>
             </a:r>
             <a:r>
-              <a:rPr kumimoji="1" lang="en-US" altLang="ja-JP" smtClean="0"/>
+              <a:rPr kumimoji="1" lang="en-US" altLang="ja-JP"/>
               <a:t>4 </a:t>
             </a:r>
             <a:r>
-              <a:rPr kumimoji="1" lang="ja-JP" altLang="en-US" smtClean="0"/>
+              <a:rPr kumimoji="1" lang="ja-JP" altLang="en-US"/>
               <a:t>レベル</a:t>
             </a:r>
           </a:p>
           <a:p>
             <a:pPr lvl="4"/>
             <a:r>
-              <a:rPr kumimoji="1" lang="ja-JP" altLang="en-US" smtClean="0"/>
+              <a:rPr kumimoji="1" lang="ja-JP" altLang="en-US"/>
               <a:t>第 </a:t>
             </a:r>
             <a:r>
-              <a:rPr kumimoji="1" lang="en-US" altLang="ja-JP" smtClean="0"/>
+              <a:rPr kumimoji="1" lang="en-US" altLang="ja-JP"/>
               <a:t>5 </a:t>
             </a:r>
             <a:r>
-              <a:rPr kumimoji="1" lang="ja-JP" altLang="en-US" smtClean="0"/>
+              <a:rPr kumimoji="1" lang="ja-JP" altLang="en-US"/>
               <a:t>レベル</a:t>
             </a:r>
-            <a:endParaRPr kumimoji="1" lang="ja-JP" altLang="en-US"/>
           </a:p>
         </p:txBody>
       </p:sp>
@@ -1319,70 +1308,69 @@
           <a:p>
             <a:pPr lvl="0"/>
             <a:r>
-              <a:rPr kumimoji="1" lang="ja-JP" altLang="en-US" smtClean="0"/>
+              <a:rPr kumimoji="1" lang="ja-JP" altLang="en-US"/>
               <a:t>マスター テキストの書式設定</a:t>
             </a:r>
           </a:p>
           <a:p>
             <a:pPr lvl="1"/>
             <a:r>
-              <a:rPr kumimoji="1" lang="ja-JP" altLang="en-US" smtClean="0"/>
+              <a:rPr kumimoji="1" lang="ja-JP" altLang="en-US"/>
               <a:t>第 </a:t>
             </a:r>
             <a:r>
-              <a:rPr kumimoji="1" lang="en-US" altLang="ja-JP" smtClean="0"/>
+              <a:rPr kumimoji="1" lang="en-US" altLang="ja-JP"/>
               <a:t>2 </a:t>
             </a:r>
             <a:r>
-              <a:rPr kumimoji="1" lang="ja-JP" altLang="en-US" smtClean="0"/>
+              <a:rPr kumimoji="1" lang="ja-JP" altLang="en-US"/>
               <a:t>レベル</a:t>
             </a:r>
           </a:p>
           <a:p>
             <a:pPr lvl="2"/>
             <a:r>
-              <a:rPr kumimoji="1" lang="ja-JP" altLang="en-US" smtClean="0"/>
+              <a:rPr kumimoji="1" lang="ja-JP" altLang="en-US"/>
               <a:t>第 </a:t>
             </a:r>
             <a:r>
-              <a:rPr kumimoji="1" lang="en-US" altLang="ja-JP" smtClean="0"/>
+              <a:rPr kumimoji="1" lang="en-US" altLang="ja-JP"/>
               <a:t>3 </a:t>
             </a:r>
             <a:r>
-              <a:rPr kumimoji="1" lang="ja-JP" altLang="en-US" smtClean="0"/>
+              <a:rPr kumimoji="1" lang="ja-JP" altLang="en-US"/>
               <a:t>レベル</a:t>
             </a:r>
           </a:p>
           <a:p>
             <a:pPr lvl="3"/>
             <a:r>
-              <a:rPr kumimoji="1" lang="ja-JP" altLang="en-US" smtClean="0"/>
+              <a:rPr kumimoji="1" lang="ja-JP" altLang="en-US"/>
               <a:t>第 </a:t>
             </a:r>
             <a:r>
-              <a:rPr kumimoji="1" lang="en-US" altLang="ja-JP" smtClean="0"/>
+              <a:rPr kumimoji="1" lang="en-US" altLang="ja-JP"/>
               <a:t>4 </a:t>
             </a:r>
             <a:r>
-              <a:rPr kumimoji="1" lang="ja-JP" altLang="en-US" smtClean="0"/>
+              <a:rPr kumimoji="1" lang="ja-JP" altLang="en-US"/>
               <a:t>レベル</a:t>
             </a:r>
           </a:p>
           <a:p>
             <a:pPr lvl="4"/>
             <a:r>
-              <a:rPr kumimoji="1" lang="ja-JP" altLang="en-US" smtClean="0"/>
+              <a:rPr kumimoji="1" lang="ja-JP" altLang="en-US"/>
               <a:t>第 </a:t>
             </a:r>
             <a:r>
-              <a:rPr kumimoji="1" lang="en-US" altLang="ja-JP" smtClean="0"/>
+              <a:rPr kumimoji="1" lang="en-US" altLang="ja-JP"/>
               <a:t>5 </a:t>
             </a:r>
             <a:r>
-              <a:rPr kumimoji="1" lang="ja-JP" altLang="en-US" smtClean="0"/>
+              <a:rPr kumimoji="1" lang="ja-JP" altLang="en-US"/>
               <a:t>レベル</a:t>
             </a:r>
-            <a:endParaRPr kumimoji="1" lang="ja-JP" altLang="en-US"/>
           </a:p>
         </p:txBody>
       </p:sp>
@@ -1403,7 +1391,7 @@
           <a:p>
             <a:fld id="{B0A8AC16-9C99-4DAF-B857-3E0C6295AE9F}" type="datetimeFigureOut">
               <a:rPr kumimoji="1" lang="ja-JP" altLang="en-US" smtClean="0"/>
-              <a:t>2026/4/13</a:t>
+              <a:t>2026/4/17</a:t>
             </a:fld>
             <a:endParaRPr kumimoji="1" lang="ja-JP" altLang="en-US"/>
           </a:p>
@@ -1502,10 +1490,9 @@
           <a:lstStyle/>
           <a:p>
             <a:r>
-              <a:rPr kumimoji="1" lang="ja-JP" altLang="en-US" smtClean="0"/>
+              <a:rPr kumimoji="1" lang="ja-JP" altLang="en-US"/>
               <a:t>マスター タイトルの書式設定</a:t>
             </a:r>
-            <a:endParaRPr kumimoji="1" lang="ja-JP" altLang="en-US"/>
           </a:p>
         </p:txBody>
       </p:sp>
@@ -1568,7 +1555,7 @@
           <a:p>
             <a:pPr lvl="0"/>
             <a:r>
-              <a:rPr kumimoji="1" lang="ja-JP" altLang="en-US" smtClean="0"/>
+              <a:rPr kumimoji="1" lang="ja-JP" altLang="en-US"/>
               <a:t>マスター テキストの書式設定</a:t>
             </a:r>
           </a:p>
@@ -1596,70 +1583,69 @@
           <a:p>
             <a:pPr lvl="0"/>
             <a:r>
-              <a:rPr kumimoji="1" lang="ja-JP" altLang="en-US" smtClean="0"/>
+              <a:rPr kumimoji="1" lang="ja-JP" altLang="en-US"/>
               <a:t>マスター テキストの書式設定</a:t>
             </a:r>
           </a:p>
           <a:p>
             <a:pPr lvl="1"/>
             <a:r>
-              <a:rPr kumimoji="1" lang="ja-JP" altLang="en-US" smtClean="0"/>
+              <a:rPr kumimoji="1" lang="ja-JP" altLang="en-US"/>
               <a:t>第 </a:t>
             </a:r>
             <a:r>
-              <a:rPr kumimoji="1" lang="en-US" altLang="ja-JP" smtClean="0"/>
+              <a:rPr kumimoji="1" lang="en-US" altLang="ja-JP"/>
               <a:t>2 </a:t>
             </a:r>
             <a:r>
-              <a:rPr kumimoji="1" lang="ja-JP" altLang="en-US" smtClean="0"/>
+              <a:rPr kumimoji="1" lang="ja-JP" altLang="en-US"/>
               <a:t>レベル</a:t>
             </a:r>
           </a:p>
           <a:p>
             <a:pPr lvl="2"/>
             <a:r>
-              <a:rPr kumimoji="1" lang="ja-JP" altLang="en-US" smtClean="0"/>
+              <a:rPr kumimoji="1" lang="ja-JP" altLang="en-US"/>
               <a:t>第 </a:t>
             </a:r>
             <a:r>
-              <a:rPr kumimoji="1" lang="en-US" altLang="ja-JP" smtClean="0"/>
+              <a:rPr kumimoji="1" lang="en-US" altLang="ja-JP"/>
               <a:t>3 </a:t>
             </a:r>
             <a:r>
-              <a:rPr kumimoji="1" lang="ja-JP" altLang="en-US" smtClean="0"/>
+              <a:rPr kumimoji="1" lang="ja-JP" altLang="en-US"/>
               <a:t>レベル</a:t>
             </a:r>
           </a:p>
           <a:p>
             <a:pPr lvl="3"/>
             <a:r>
-              <a:rPr kumimoji="1" lang="ja-JP" altLang="en-US" smtClean="0"/>
+              <a:rPr kumimoji="1" lang="ja-JP" altLang="en-US"/>
               <a:t>第 </a:t>
             </a:r>
             <a:r>
-              <a:rPr kumimoji="1" lang="en-US" altLang="ja-JP" smtClean="0"/>
+              <a:rPr kumimoji="1" lang="en-US" altLang="ja-JP"/>
               <a:t>4 </a:t>
             </a:r>
             <a:r>
-              <a:rPr kumimoji="1" lang="ja-JP" altLang="en-US" smtClean="0"/>
+              <a:rPr kumimoji="1" lang="ja-JP" altLang="en-US"/>
               <a:t>レベル</a:t>
             </a:r>
           </a:p>
           <a:p>
             <a:pPr lvl="4"/>
             <a:r>
-              <a:rPr kumimoji="1" lang="ja-JP" altLang="en-US" smtClean="0"/>
+              <a:rPr kumimoji="1" lang="ja-JP" altLang="en-US"/>
               <a:t>第 </a:t>
             </a:r>
             <a:r>
-              <a:rPr kumimoji="1" lang="en-US" altLang="ja-JP" smtClean="0"/>
+              <a:rPr kumimoji="1" lang="en-US" altLang="ja-JP"/>
               <a:t>5 </a:t>
             </a:r>
             <a:r>
-              <a:rPr kumimoji="1" lang="ja-JP" altLang="en-US" smtClean="0"/>
+              <a:rPr kumimoji="1" lang="ja-JP" altLang="en-US"/>
               <a:t>レベル</a:t>
             </a:r>
-            <a:endParaRPr kumimoji="1" lang="ja-JP" altLang="en-US"/>
           </a:p>
         </p:txBody>
       </p:sp>
@@ -1722,7 +1708,7 @@
           <a:p>
             <a:pPr lvl="0"/>
             <a:r>
-              <a:rPr kumimoji="1" lang="ja-JP" altLang="en-US" smtClean="0"/>
+              <a:rPr kumimoji="1" lang="ja-JP" altLang="en-US"/>
               <a:t>マスター テキストの書式設定</a:t>
             </a:r>
           </a:p>
@@ -1750,70 +1736,69 @@
           <a:p>
             <a:pPr lvl="0"/>
             <a:r>
-              <a:rPr kumimoji="1" lang="ja-JP" altLang="en-US" smtClean="0"/>
+              <a:rPr kumimoji="1" lang="ja-JP" altLang="en-US"/>
               <a:t>マスター テキストの書式設定</a:t>
             </a:r>
           </a:p>
           <a:p>
             <a:pPr lvl="1"/>
             <a:r>
-              <a:rPr kumimoji="1" lang="ja-JP" altLang="en-US" smtClean="0"/>
+              <a:rPr kumimoji="1" lang="ja-JP" altLang="en-US"/>
               <a:t>第 </a:t>
             </a:r>
             <a:r>
-              <a:rPr kumimoji="1" lang="en-US" altLang="ja-JP" smtClean="0"/>
+              <a:rPr kumimoji="1" lang="en-US" altLang="ja-JP"/>
               <a:t>2 </a:t>
             </a:r>
             <a:r>
-              <a:rPr kumimoji="1" lang="ja-JP" altLang="en-US" smtClean="0"/>
+              <a:rPr kumimoji="1" lang="ja-JP" altLang="en-US"/>
               <a:t>レベル</a:t>
             </a:r>
           </a:p>
           <a:p>
             <a:pPr lvl="2"/>
             <a:r>
-              <a:rPr kumimoji="1" lang="ja-JP" altLang="en-US" smtClean="0"/>
+              <a:rPr kumimoji="1" lang="ja-JP" altLang="en-US"/>
               <a:t>第 </a:t>
             </a:r>
             <a:r>
-              <a:rPr kumimoji="1" lang="en-US" altLang="ja-JP" smtClean="0"/>
+              <a:rPr kumimoji="1" lang="en-US" altLang="ja-JP"/>
               <a:t>3 </a:t>
             </a:r>
             <a:r>
-              <a:rPr kumimoji="1" lang="ja-JP" altLang="en-US" smtClean="0"/>
+              <a:rPr kumimoji="1" lang="ja-JP" altLang="en-US"/>
               <a:t>レベル</a:t>
             </a:r>
           </a:p>
           <a:p>
             <a:pPr lvl="3"/>
             <a:r>
-              <a:rPr kumimoji="1" lang="ja-JP" altLang="en-US" smtClean="0"/>
+              <a:rPr kumimoji="1" lang="ja-JP" altLang="en-US"/>
               <a:t>第 </a:t>
             </a:r>
             <a:r>
-              <a:rPr kumimoji="1" lang="en-US" altLang="ja-JP" smtClean="0"/>
+              <a:rPr kumimoji="1" lang="en-US" altLang="ja-JP"/>
               <a:t>4 </a:t>
             </a:r>
             <a:r>
-              <a:rPr kumimoji="1" lang="ja-JP" altLang="en-US" smtClean="0"/>
+              <a:rPr kumimoji="1" lang="ja-JP" altLang="en-US"/>
               <a:t>レベル</a:t>
             </a:r>
           </a:p>
           <a:p>
             <a:pPr lvl="4"/>
             <a:r>
-              <a:rPr kumimoji="1" lang="ja-JP" altLang="en-US" smtClean="0"/>
+              <a:rPr kumimoji="1" lang="ja-JP" altLang="en-US"/>
               <a:t>第 </a:t>
             </a:r>
             <a:r>
-              <a:rPr kumimoji="1" lang="en-US" altLang="ja-JP" smtClean="0"/>
+              <a:rPr kumimoji="1" lang="en-US" altLang="ja-JP"/>
               <a:t>5 </a:t>
             </a:r>
             <a:r>
-              <a:rPr kumimoji="1" lang="ja-JP" altLang="en-US" smtClean="0"/>
+              <a:rPr kumimoji="1" lang="ja-JP" altLang="en-US"/>
               <a:t>レベル</a:t>
             </a:r>
-            <a:endParaRPr kumimoji="1" lang="ja-JP" altLang="en-US"/>
           </a:p>
         </p:txBody>
       </p:sp>
@@ -1834,7 +1819,7 @@
           <a:p>
             <a:fld id="{B0A8AC16-9C99-4DAF-B857-3E0C6295AE9F}" type="datetimeFigureOut">
               <a:rPr kumimoji="1" lang="ja-JP" altLang="en-US" smtClean="0"/>
-              <a:t>2026/4/13</a:t>
+              <a:t>2026/4/17</a:t>
             </a:fld>
             <a:endParaRPr kumimoji="1" lang="ja-JP" altLang="en-US"/>
           </a:p>
@@ -1928,10 +1913,9 @@
           <a:lstStyle/>
           <a:p>
             <a:r>
-              <a:rPr kumimoji="1" lang="ja-JP" altLang="en-US" smtClean="0"/>
+              <a:rPr kumimoji="1" lang="ja-JP" altLang="en-US"/>
               <a:t>マスター タイトルの書式設定</a:t>
             </a:r>
-            <a:endParaRPr kumimoji="1" lang="ja-JP" altLang="en-US"/>
           </a:p>
         </p:txBody>
       </p:sp>
@@ -1952,7 +1936,7 @@
           <a:p>
             <a:fld id="{B0A8AC16-9C99-4DAF-B857-3E0C6295AE9F}" type="datetimeFigureOut">
               <a:rPr kumimoji="1" lang="ja-JP" altLang="en-US" smtClean="0"/>
-              <a:t>2026/4/13</a:t>
+              <a:t>2026/4/17</a:t>
             </a:fld>
             <a:endParaRPr kumimoji="1" lang="ja-JP" altLang="en-US"/>
           </a:p>
@@ -2047,7 +2031,7 @@
           <a:p>
             <a:fld id="{B0A8AC16-9C99-4DAF-B857-3E0C6295AE9F}" type="datetimeFigureOut">
               <a:rPr kumimoji="1" lang="ja-JP" altLang="en-US" smtClean="0"/>
-              <a:t>2026/4/13</a:t>
+              <a:t>2026/4/17</a:t>
             </a:fld>
             <a:endParaRPr kumimoji="1" lang="ja-JP" altLang="en-US"/>
           </a:p>
@@ -2150,10 +2134,9 @@
           </a:lstStyle>
           <a:p>
             <a:r>
-              <a:rPr kumimoji="1" lang="ja-JP" altLang="en-US" smtClean="0"/>
+              <a:rPr kumimoji="1" lang="ja-JP" altLang="en-US"/>
               <a:t>マスター タイトルの書式設定</a:t>
             </a:r>
-            <a:endParaRPr kumimoji="1" lang="ja-JP" altLang="en-US"/>
           </a:p>
         </p:txBody>
       </p:sp>
@@ -2207,70 +2190,69 @@
           <a:p>
             <a:pPr lvl="0"/>
             <a:r>
-              <a:rPr kumimoji="1" lang="ja-JP" altLang="en-US" smtClean="0"/>
+              <a:rPr kumimoji="1" lang="ja-JP" altLang="en-US"/>
               <a:t>マスター テキストの書式設定</a:t>
             </a:r>
           </a:p>
           <a:p>
             <a:pPr lvl="1"/>
             <a:r>
-              <a:rPr kumimoji="1" lang="ja-JP" altLang="en-US" smtClean="0"/>
+              <a:rPr kumimoji="1" lang="ja-JP" altLang="en-US"/>
               <a:t>第 </a:t>
             </a:r>
             <a:r>
-              <a:rPr kumimoji="1" lang="en-US" altLang="ja-JP" smtClean="0"/>
+              <a:rPr kumimoji="1" lang="en-US" altLang="ja-JP"/>
               <a:t>2 </a:t>
             </a:r>
             <a:r>
-              <a:rPr kumimoji="1" lang="ja-JP" altLang="en-US" smtClean="0"/>
+              <a:rPr kumimoji="1" lang="ja-JP" altLang="en-US"/>
               <a:t>レベル</a:t>
             </a:r>
           </a:p>
           <a:p>
             <a:pPr lvl="2"/>
             <a:r>
-              <a:rPr kumimoji="1" lang="ja-JP" altLang="en-US" smtClean="0"/>
+              <a:rPr kumimoji="1" lang="ja-JP" altLang="en-US"/>
               <a:t>第 </a:t>
             </a:r>
             <a:r>
-              <a:rPr kumimoji="1" lang="en-US" altLang="ja-JP" smtClean="0"/>
+              <a:rPr kumimoji="1" lang="en-US" altLang="ja-JP"/>
               <a:t>3 </a:t>
             </a:r>
             <a:r>
-              <a:rPr kumimoji="1" lang="ja-JP" altLang="en-US" smtClean="0"/>
+              <a:rPr kumimoji="1" lang="ja-JP" altLang="en-US"/>
               <a:t>レベル</a:t>
             </a:r>
           </a:p>
           <a:p>
             <a:pPr lvl="3"/>
             <a:r>
-              <a:rPr kumimoji="1" lang="ja-JP" altLang="en-US" smtClean="0"/>
+              <a:rPr kumimoji="1" lang="ja-JP" altLang="en-US"/>
               <a:t>第 </a:t>
             </a:r>
             <a:r>
-              <a:rPr kumimoji="1" lang="en-US" altLang="ja-JP" smtClean="0"/>
+              <a:rPr kumimoji="1" lang="en-US" altLang="ja-JP"/>
               <a:t>4 </a:t>
             </a:r>
             <a:r>
-              <a:rPr kumimoji="1" lang="ja-JP" altLang="en-US" smtClean="0"/>
+              <a:rPr kumimoji="1" lang="ja-JP" altLang="en-US"/>
               <a:t>レベル</a:t>
             </a:r>
           </a:p>
           <a:p>
             <a:pPr lvl="4"/>
             <a:r>
-              <a:rPr kumimoji="1" lang="ja-JP" altLang="en-US" smtClean="0"/>
+              <a:rPr kumimoji="1" lang="ja-JP" altLang="en-US"/>
               <a:t>第 </a:t>
             </a:r>
             <a:r>
-              <a:rPr kumimoji="1" lang="en-US" altLang="ja-JP" smtClean="0"/>
+              <a:rPr kumimoji="1" lang="en-US" altLang="ja-JP"/>
               <a:t>5 </a:t>
             </a:r>
             <a:r>
-              <a:rPr kumimoji="1" lang="ja-JP" altLang="en-US" smtClean="0"/>
+              <a:rPr kumimoji="1" lang="ja-JP" altLang="en-US"/>
               <a:t>レベル</a:t>
             </a:r>
-            <a:endParaRPr kumimoji="1" lang="ja-JP" altLang="en-US"/>
           </a:p>
         </p:txBody>
       </p:sp>
@@ -2333,7 +2315,7 @@
           <a:p>
             <a:pPr lvl="0"/>
             <a:r>
-              <a:rPr kumimoji="1" lang="ja-JP" altLang="en-US" smtClean="0"/>
+              <a:rPr kumimoji="1" lang="ja-JP" altLang="en-US"/>
               <a:t>マスター テキストの書式設定</a:t>
             </a:r>
           </a:p>
@@ -2356,7 +2338,7 @@
           <a:p>
             <a:fld id="{B0A8AC16-9C99-4DAF-B857-3E0C6295AE9F}" type="datetimeFigureOut">
               <a:rPr kumimoji="1" lang="ja-JP" altLang="en-US" smtClean="0"/>
-              <a:t>2026/4/13</a:t>
+              <a:t>2026/4/17</a:t>
             </a:fld>
             <a:endParaRPr kumimoji="1" lang="ja-JP" altLang="en-US"/>
           </a:p>
@@ -2459,10 +2441,9 @@
           </a:lstStyle>
           <a:p>
             <a:r>
-              <a:rPr kumimoji="1" lang="ja-JP" altLang="en-US" smtClean="0"/>
+              <a:rPr kumimoji="1" lang="ja-JP" altLang="en-US"/>
               <a:t>マスター タイトルの書式設定</a:t>
             </a:r>
-            <a:endParaRPr kumimoji="1" lang="ja-JP" altLang="en-US"/>
           </a:p>
         </p:txBody>
       </p:sp>
@@ -2586,7 +2567,7 @@
           <a:p>
             <a:pPr lvl="0"/>
             <a:r>
-              <a:rPr kumimoji="1" lang="ja-JP" altLang="en-US" smtClean="0"/>
+              <a:rPr kumimoji="1" lang="ja-JP" altLang="en-US"/>
               <a:t>マスター テキストの書式設定</a:t>
             </a:r>
           </a:p>
@@ -2609,7 +2590,7 @@
           <a:p>
             <a:fld id="{B0A8AC16-9C99-4DAF-B857-3E0C6295AE9F}" type="datetimeFigureOut">
               <a:rPr kumimoji="1" lang="ja-JP" altLang="en-US" smtClean="0"/>
-              <a:t>2026/4/13</a:t>
+              <a:t>2026/4/17</a:t>
             </a:fld>
             <a:endParaRPr kumimoji="1" lang="ja-JP" altLang="en-US"/>
           </a:p>
@@ -2718,10 +2699,9 @@
           <a:lstStyle/>
           <a:p>
             <a:r>
-              <a:rPr kumimoji="1" lang="ja-JP" altLang="en-US" smtClean="0"/>
+              <a:rPr kumimoji="1" lang="ja-JP" altLang="en-US"/>
               <a:t>マスター タイトルの書式設定</a:t>
             </a:r>
-            <a:endParaRPr kumimoji="1" lang="ja-JP" altLang="en-US"/>
           </a:p>
         </p:txBody>
       </p:sp>
@@ -2752,70 +2732,69 @@
           <a:p>
             <a:pPr lvl="0"/>
             <a:r>
-              <a:rPr kumimoji="1" lang="ja-JP" altLang="en-US" smtClean="0"/>
+              <a:rPr kumimoji="1" lang="ja-JP" altLang="en-US"/>
               <a:t>マスター テキストの書式設定</a:t>
             </a:r>
           </a:p>
           <a:p>
             <a:pPr lvl="1"/>
             <a:r>
-              <a:rPr kumimoji="1" lang="ja-JP" altLang="en-US" smtClean="0"/>
+              <a:rPr kumimoji="1" lang="ja-JP" altLang="en-US"/>
               <a:t>第 </a:t>
             </a:r>
             <a:r>
-              <a:rPr kumimoji="1" lang="en-US" altLang="ja-JP" smtClean="0"/>
+              <a:rPr kumimoji="1" lang="en-US" altLang="ja-JP"/>
               <a:t>2 </a:t>
             </a:r>
             <a:r>
-              <a:rPr kumimoji="1" lang="ja-JP" altLang="en-US" smtClean="0"/>
+              <a:rPr kumimoji="1" lang="ja-JP" altLang="en-US"/>
               <a:t>レベル</a:t>
             </a:r>
           </a:p>
           <a:p>
             <a:pPr lvl="2"/>
             <a:r>
-              <a:rPr kumimoji="1" lang="ja-JP" altLang="en-US" smtClean="0"/>
+              <a:rPr kumimoji="1" lang="ja-JP" altLang="en-US"/>
               <a:t>第 </a:t>
             </a:r>
             <a:r>
-              <a:rPr kumimoji="1" lang="en-US" altLang="ja-JP" smtClean="0"/>
+              <a:rPr kumimoji="1" lang="en-US" altLang="ja-JP"/>
               <a:t>3 </a:t>
             </a:r>
             <a:r>
-              <a:rPr kumimoji="1" lang="ja-JP" altLang="en-US" smtClean="0"/>
+              <a:rPr kumimoji="1" lang="ja-JP" altLang="en-US"/>
               <a:t>レベル</a:t>
             </a:r>
           </a:p>
           <a:p>
             <a:pPr lvl="3"/>
             <a:r>
-              <a:rPr kumimoji="1" lang="ja-JP" altLang="en-US" smtClean="0"/>
+              <a:rPr kumimoji="1" lang="ja-JP" altLang="en-US"/>
               <a:t>第 </a:t>
             </a:r>
             <a:r>
-              <a:rPr kumimoji="1" lang="en-US" altLang="ja-JP" smtClean="0"/>
+              <a:rPr kumimoji="1" lang="en-US" altLang="ja-JP"/>
               <a:t>4 </a:t>
             </a:r>
             <a:r>
-              <a:rPr kumimoji="1" lang="ja-JP" altLang="en-US" smtClean="0"/>
+              <a:rPr kumimoji="1" lang="ja-JP" altLang="en-US"/>
               <a:t>レベル</a:t>
             </a:r>
           </a:p>
           <a:p>
             <a:pPr lvl="4"/>
             <a:r>
-              <a:rPr kumimoji="1" lang="ja-JP" altLang="en-US" smtClean="0"/>
+              <a:rPr kumimoji="1" lang="ja-JP" altLang="en-US"/>
               <a:t>第 </a:t>
             </a:r>
             <a:r>
-              <a:rPr kumimoji="1" lang="en-US" altLang="ja-JP" smtClean="0"/>
+              <a:rPr kumimoji="1" lang="en-US" altLang="ja-JP"/>
               <a:t>5 </a:t>
             </a:r>
             <a:r>
-              <a:rPr kumimoji="1" lang="ja-JP" altLang="en-US" smtClean="0"/>
+              <a:rPr kumimoji="1" lang="ja-JP" altLang="en-US"/>
               <a:t>レベル</a:t>
             </a:r>
-            <a:endParaRPr kumimoji="1" lang="ja-JP" altLang="en-US"/>
           </a:p>
         </p:txBody>
       </p:sp>
@@ -2854,7 +2833,7 @@
           <a:p>
             <a:fld id="{B0A8AC16-9C99-4DAF-B857-3E0C6295AE9F}" type="datetimeFigureOut">
               <a:rPr kumimoji="1" lang="ja-JP" altLang="en-US" smtClean="0"/>
-              <a:t>2026/4/13</a:t>
+              <a:t>2026/4/17</a:t>
             </a:fld>
             <a:endParaRPr kumimoji="1" lang="ja-JP" altLang="en-US"/>
           </a:p>
@@ -3275,11 +3254,11 @@
           <a:lstStyle/>
           <a:p>
             <a:r>
-              <a:rPr lang="ja-JP" altLang="en-US" dirty="0" smtClean="0"/>
+              <a:rPr lang="ja-JP" altLang="en-US" dirty="0"/>
               <a:t>爆走チャリンコ</a:t>
             </a:r>
             <a:r>
-              <a:rPr lang="ja-JP" altLang="en-US" sz="3600" dirty="0" smtClean="0"/>
+              <a:rPr lang="ja-JP" altLang="en-US" sz="3600" dirty="0"/>
               <a:t>（爆チャリ）</a:t>
             </a:r>
             <a:endParaRPr kumimoji="1" lang="ja-JP" altLang="en-US" dirty="0"/>
@@ -3302,43 +3281,12 @@
           <a:lstStyle/>
           <a:p>
             <a:r>
-              <a:rPr kumimoji="1" lang="ja-JP" altLang="en-US" dirty="0" smtClean="0"/>
+              <a:rPr kumimoji="1" lang="ja-JP" altLang="en-US" dirty="0"/>
               <a:t>川﨑、中西</a:t>
             </a:r>
-            <a:endParaRPr kumimoji="1" lang="ja-JP" altLang="en-US" dirty="0"/>
-          </a:p>
-        </p:txBody>
-      </p:sp>
-      <p:pic>
-        <p:nvPicPr>
-          <p:cNvPr id="4" name="図 3"/>
-          <p:cNvPicPr>
-            <a:picLocks noChangeAspect="1"/>
-          </p:cNvPicPr>
-          <p:nvPr/>
-        </p:nvPicPr>
-        <p:blipFill>
-          <a:blip r:embed="rId2">
-            <a:extLst>
-              <a:ext uri="{28A0092B-C50C-407E-A947-70E740481C1C}">
-                <a14:useLocalDpi xmlns:a14="http://schemas.microsoft.com/office/drawing/2010/main" val="0"/>
-              </a:ext>
-            </a:extLst>
-          </a:blip>
-          <a:stretch>
-            <a:fillRect/>
-          </a:stretch>
-        </p:blipFill>
-        <p:spPr>
-          <a:xfrm>
-            <a:off x="8029793" y="3397540"/>
-            <a:ext cx="2979822" cy="3376569"/>
-          </a:xfrm>
-          <a:prstGeom prst="rect">
-            <a:avLst/>
-          </a:prstGeom>
-        </p:spPr>
-      </p:pic>
+          </a:p>
+        </p:txBody>
+      </p:sp>
     </p:spTree>
     <p:extLst>
       <p:ext uri="{BB962C8B-B14F-4D97-AF65-F5344CB8AC3E}">
@@ -3392,10 +3340,9 @@
           <a:lstStyle/>
           <a:p>
             <a:r>
-              <a:rPr kumimoji="1" lang="ja-JP" altLang="en-US" sz="7200" dirty="0" smtClean="0"/>
+              <a:rPr kumimoji="1" lang="ja-JP" altLang="en-US" sz="7200" dirty="0"/>
               <a:t>ゲーム概要</a:t>
             </a:r>
-            <a:endParaRPr kumimoji="1" lang="ja-JP" altLang="en-US" sz="7200" dirty="0"/>
           </a:p>
         </p:txBody>
       </p:sp>
@@ -3425,21 +3372,21 @@
               <a:buNone/>
             </a:pPr>
             <a:r>
-              <a:rPr kumimoji="1" lang="ja-JP" altLang="en-US" sz="4400" dirty="0" smtClean="0"/>
+              <a:rPr kumimoji="1" lang="ja-JP" altLang="en-US" sz="4400" dirty="0"/>
               <a:t>ジャンル：アクション</a:t>
             </a:r>
-            <a:endParaRPr kumimoji="1" lang="en-US" altLang="ja-JP" sz="4400" dirty="0" smtClean="0"/>
+            <a:endParaRPr kumimoji="1" lang="en-US" altLang="ja-JP" sz="4400" dirty="0"/>
           </a:p>
           <a:p>
             <a:pPr marL="0" indent="0">
               <a:buNone/>
             </a:pPr>
             <a:r>
-              <a:rPr kumimoji="1" lang="ja-JP" altLang="en-US" sz="4400" dirty="0" smtClean="0"/>
+              <a:rPr kumimoji="1" lang="ja-JP" altLang="en-US" sz="4400" dirty="0"/>
               <a:t>開発環境：</a:t>
             </a:r>
             <a:r>
-              <a:rPr kumimoji="1" lang="en-US" altLang="ja-JP" sz="4400" dirty="0" smtClean="0"/>
+              <a:rPr kumimoji="1" lang="en-US" altLang="ja-JP" sz="4400" dirty="0"/>
               <a:t>Unity</a:t>
             </a:r>
           </a:p>
@@ -3449,54 +3396,20 @@
             </a:pPr>
             <a:r>
               <a:rPr lang="ja-JP" altLang="en-US" sz="4400" dirty="0"/>
-              <a:t>プレイ</a:t>
-            </a:r>
-            <a:r>
-              <a:rPr lang="ja-JP" altLang="en-US" sz="4400" dirty="0" smtClean="0"/>
-              <a:t>人数：</a:t>
-            </a:r>
-            <a:r>
-              <a:rPr lang="en-US" altLang="ja-JP" sz="4400" dirty="0" smtClean="0"/>
+              <a:t>プレイ人数：</a:t>
+            </a:r>
+            <a:r>
+              <a:rPr lang="en-US" altLang="ja-JP" sz="4400" dirty="0"/>
               <a:t>1</a:t>
             </a:r>
             <a:r>
-              <a:rPr lang="ja-JP" altLang="en-US" sz="4400" dirty="0" smtClean="0"/>
+              <a:rPr lang="ja-JP" altLang="en-US" sz="4400" dirty="0"/>
               <a:t>人</a:t>
             </a:r>
-            <a:endParaRPr lang="en-US" altLang="ja-JP" sz="4400" dirty="0" smtClean="0"/>
-          </a:p>
-        </p:txBody>
-      </p:sp>
-      <p:pic>
-        <p:nvPicPr>
-          <p:cNvPr id="4" name="図 3"/>
-          <p:cNvPicPr>
-            <a:picLocks noChangeAspect="1"/>
-          </p:cNvPicPr>
-          <p:nvPr/>
-        </p:nvPicPr>
-        <p:blipFill>
-          <a:blip r:embed="rId2">
-            <a:extLst>
-              <a:ext uri="{28A0092B-C50C-407E-A947-70E740481C1C}">
-                <a14:useLocalDpi xmlns:a14="http://schemas.microsoft.com/office/drawing/2010/main" val="0"/>
-              </a:ext>
-            </a:extLst>
-          </a:blip>
-          <a:stretch>
-            <a:fillRect/>
-          </a:stretch>
-        </p:blipFill>
-        <p:spPr>
-          <a:xfrm>
-            <a:off x="8029793" y="3397540"/>
-            <a:ext cx="2979822" cy="3376569"/>
-          </a:xfrm>
-          <a:prstGeom prst="rect">
-            <a:avLst/>
-          </a:prstGeom>
-        </p:spPr>
-      </p:pic>
+            <a:endParaRPr lang="en-US" altLang="ja-JP" sz="4400" dirty="0"/>
+          </a:p>
+        </p:txBody>
+      </p:sp>
     </p:spTree>
     <p:extLst>
       <p:ext uri="{BB962C8B-B14F-4D97-AF65-F5344CB8AC3E}">
@@ -3543,10 +3456,9 @@
           <a:lstStyle/>
           <a:p>
             <a:r>
-              <a:rPr kumimoji="1" lang="ja-JP" altLang="en-US" dirty="0" smtClean="0"/>
+              <a:rPr kumimoji="1" lang="ja-JP" altLang="en-US" dirty="0"/>
               <a:t>ゲーム説明</a:t>
             </a:r>
-            <a:endParaRPr kumimoji="1" lang="ja-JP" altLang="en-US" dirty="0"/>
           </a:p>
         </p:txBody>
       </p:sp>
@@ -3566,81 +3478,51 @@
           <a:lstStyle/>
           <a:p>
             <a:r>
-              <a:rPr kumimoji="1" lang="ja-JP" altLang="en-US" dirty="0" smtClean="0"/>
+              <a:rPr kumimoji="1" lang="ja-JP" altLang="en-US" dirty="0"/>
               <a:t>自転車に乗りながらゴールを目指す</a:t>
             </a:r>
-            <a:endParaRPr kumimoji="1" lang="en-US" altLang="ja-JP" dirty="0" smtClean="0"/>
-          </a:p>
-          <a:p>
-            <a:r>
-              <a:rPr kumimoji="1" lang="ja-JP" altLang="en-US" dirty="0" smtClean="0"/>
+            <a:endParaRPr kumimoji="1" lang="en-US" altLang="ja-JP" dirty="0"/>
+          </a:p>
+          <a:p>
+            <a:r>
+              <a:rPr kumimoji="1" lang="ja-JP" altLang="en-US" dirty="0"/>
               <a:t>プレイヤーの体が</a:t>
             </a:r>
             <a:r>
               <a:rPr lang="ja-JP" altLang="en-US" dirty="0"/>
               <a:t>ふにゃふにゃ</a:t>
             </a:r>
-            <a:endParaRPr kumimoji="1" lang="en-US" altLang="ja-JP" dirty="0" smtClean="0"/>
-          </a:p>
-          <a:p>
-            <a:r>
-              <a:rPr kumimoji="1" lang="ja-JP" altLang="en-US" dirty="0" smtClean="0"/>
+            <a:endParaRPr kumimoji="1" lang="en-US" altLang="ja-JP" dirty="0"/>
+          </a:p>
+          <a:p>
+            <a:r>
+              <a:rPr kumimoji="1" lang="ja-JP" altLang="en-US" dirty="0"/>
               <a:t>プレイヤーが転倒しないようにスピード調節しながらバランスをとる</a:t>
             </a:r>
-            <a:endParaRPr kumimoji="1" lang="en-US" altLang="ja-JP" dirty="0" smtClean="0"/>
-          </a:p>
-          <a:p>
-            <a:r>
-              <a:rPr lang="ja-JP" altLang="en-US" dirty="0" smtClean="0"/>
+            <a:endParaRPr kumimoji="1" lang="en-US" altLang="ja-JP" dirty="0"/>
+          </a:p>
+          <a:p>
+            <a:r>
+              <a:rPr lang="ja-JP" altLang="en-US" dirty="0"/>
               <a:t>頭をぶつけたら</a:t>
             </a:r>
             <a:r>
-              <a:rPr kumimoji="1" lang="ja-JP" altLang="en-US" dirty="0" smtClean="0"/>
+              <a:rPr kumimoji="1" lang="ja-JP" altLang="en-US" dirty="0"/>
               <a:t>ゲームオーバー</a:t>
             </a:r>
-            <a:endParaRPr kumimoji="1" lang="en-US" altLang="ja-JP" dirty="0" smtClean="0"/>
-          </a:p>
-          <a:p>
-            <a:endParaRPr kumimoji="1" lang="en-US" altLang="ja-JP" dirty="0" smtClean="0"/>
-          </a:p>
-          <a:p>
-            <a:endParaRPr kumimoji="1" lang="en-US" altLang="ja-JP" dirty="0" smtClean="0"/>
+            <a:endParaRPr kumimoji="1" lang="en-US" altLang="ja-JP" dirty="0"/>
+          </a:p>
+          <a:p>
+            <a:endParaRPr kumimoji="1" lang="en-US" altLang="ja-JP" dirty="0"/>
+          </a:p>
+          <a:p>
+            <a:endParaRPr kumimoji="1" lang="en-US" altLang="ja-JP" dirty="0"/>
           </a:p>
           <a:p>
             <a:endParaRPr kumimoji="1" lang="ja-JP" altLang="en-US" dirty="0"/>
           </a:p>
         </p:txBody>
       </p:sp>
-      <p:pic>
-        <p:nvPicPr>
-          <p:cNvPr id="4" name="図 3"/>
-          <p:cNvPicPr>
-            <a:picLocks noChangeAspect="1"/>
-          </p:cNvPicPr>
-          <p:nvPr/>
-        </p:nvPicPr>
-        <p:blipFill>
-          <a:blip r:embed="rId2">
-            <a:extLst>
-              <a:ext uri="{28A0092B-C50C-407E-A947-70E740481C1C}">
-                <a14:useLocalDpi xmlns:a14="http://schemas.microsoft.com/office/drawing/2010/main" val="0"/>
-              </a:ext>
-            </a:extLst>
-          </a:blip>
-          <a:stretch>
-            <a:fillRect/>
-          </a:stretch>
-        </p:blipFill>
-        <p:spPr>
-          <a:xfrm>
-            <a:off x="8029793" y="3397540"/>
-            <a:ext cx="2979822" cy="3376569"/>
-          </a:xfrm>
-          <a:prstGeom prst="rect">
-            <a:avLst/>
-          </a:prstGeom>
-        </p:spPr>
-      </p:pic>
     </p:spTree>
     <p:extLst>
       <p:ext uri="{BB962C8B-B14F-4D97-AF65-F5344CB8AC3E}">

--- a/爆チャリ.pptx
+++ b/爆チャリ.pptx
@@ -3287,6 +3287,42 @@
           </a:p>
         </p:txBody>
       </p:sp>
+      <p:pic>
+        <p:nvPicPr>
+          <p:cNvPr id="5" name="図 4">
+            <a:extLst>
+              <a:ext uri="{FF2B5EF4-FFF2-40B4-BE49-F238E27FC236}">
+                <a16:creationId xmlns:a16="http://schemas.microsoft.com/office/drawing/2014/main" id="{479BD962-3D05-1755-C7F4-CDA06864C5F9}"/>
+              </a:ext>
+            </a:extLst>
+          </p:cNvPr>
+          <p:cNvPicPr>
+            <a:picLocks noChangeAspect="1"/>
+          </p:cNvPicPr>
+          <p:nvPr/>
+        </p:nvPicPr>
+        <p:blipFill>
+          <a:blip r:embed="rId2">
+            <a:extLst>
+              <a:ext uri="{28A0092B-C50C-407E-A947-70E740481C1C}">
+                <a14:useLocalDpi xmlns:a14="http://schemas.microsoft.com/office/drawing/2010/main" val="0"/>
+              </a:ext>
+            </a:extLst>
+          </a:blip>
+          <a:stretch>
+            <a:fillRect/>
+          </a:stretch>
+        </p:blipFill>
+        <p:spPr>
+          <a:xfrm>
+            <a:off x="8670607" y="3255962"/>
+            <a:ext cx="3178799" cy="3602038"/>
+          </a:xfrm>
+          <a:prstGeom prst="rect">
+            <a:avLst/>
+          </a:prstGeom>
+        </p:spPr>
+      </p:pic>
     </p:spTree>
     <p:extLst>
       <p:ext uri="{BB962C8B-B14F-4D97-AF65-F5344CB8AC3E}">
@@ -3373,7 +3409,15 @@
             </a:pPr>
             <a:r>
               <a:rPr kumimoji="1" lang="ja-JP" altLang="en-US" sz="4400" dirty="0"/>
-              <a:t>ジャンル：アクション</a:t>
+              <a:t>ジャンル：横スクロール</a:t>
+            </a:r>
+            <a:r>
+              <a:rPr kumimoji="1" lang="en-US" altLang="ja-JP" sz="4400" dirty="0"/>
+              <a:t>2D</a:t>
+            </a:r>
+            <a:r>
+              <a:rPr kumimoji="1" lang="ja-JP" altLang="en-US" sz="4400" dirty="0"/>
+              <a:t>アクション</a:t>
             </a:r>
             <a:endParaRPr kumimoji="1" lang="en-US" altLang="ja-JP" sz="4400" dirty="0"/>
           </a:p>
@@ -3410,6 +3454,42 @@
           </a:p>
         </p:txBody>
       </p:sp>
+      <p:pic>
+        <p:nvPicPr>
+          <p:cNvPr id="4" name="図 3">
+            <a:extLst>
+              <a:ext uri="{FF2B5EF4-FFF2-40B4-BE49-F238E27FC236}">
+                <a16:creationId xmlns:a16="http://schemas.microsoft.com/office/drawing/2014/main" id="{63BF7E92-96A8-763B-E4D1-C5C9A8B798C3}"/>
+              </a:ext>
+            </a:extLst>
+          </p:cNvPr>
+          <p:cNvPicPr>
+            <a:picLocks noChangeAspect="1"/>
+          </p:cNvPicPr>
+          <p:nvPr/>
+        </p:nvPicPr>
+        <p:blipFill>
+          <a:blip r:embed="rId2">
+            <a:extLst>
+              <a:ext uri="{28A0092B-C50C-407E-A947-70E740481C1C}">
+                <a14:useLocalDpi xmlns:a14="http://schemas.microsoft.com/office/drawing/2010/main" val="0"/>
+              </a:ext>
+            </a:extLst>
+          </a:blip>
+          <a:stretch>
+            <a:fillRect/>
+          </a:stretch>
+        </p:blipFill>
+        <p:spPr>
+          <a:xfrm>
+            <a:off x="8670607" y="3255962"/>
+            <a:ext cx="3178799" cy="3602038"/>
+          </a:xfrm>
+          <a:prstGeom prst="rect">
+            <a:avLst/>
+          </a:prstGeom>
+        </p:spPr>
+      </p:pic>
     </p:spTree>
     <p:extLst>
       <p:ext uri="{BB962C8B-B14F-4D97-AF65-F5344CB8AC3E}">
@@ -3523,6 +3603,42 @@
           </a:p>
         </p:txBody>
       </p:sp>
+      <p:pic>
+        <p:nvPicPr>
+          <p:cNvPr id="4" name="図 3">
+            <a:extLst>
+              <a:ext uri="{FF2B5EF4-FFF2-40B4-BE49-F238E27FC236}">
+                <a16:creationId xmlns:a16="http://schemas.microsoft.com/office/drawing/2014/main" id="{40663752-4E96-B5D5-EAF2-30BBC178937B}"/>
+              </a:ext>
+            </a:extLst>
+          </p:cNvPr>
+          <p:cNvPicPr>
+            <a:picLocks noChangeAspect="1"/>
+          </p:cNvPicPr>
+          <p:nvPr/>
+        </p:nvPicPr>
+        <p:blipFill>
+          <a:blip r:embed="rId2">
+            <a:extLst>
+              <a:ext uri="{28A0092B-C50C-407E-A947-70E740481C1C}">
+                <a14:useLocalDpi xmlns:a14="http://schemas.microsoft.com/office/drawing/2010/main" val="0"/>
+              </a:ext>
+            </a:extLst>
+          </a:blip>
+          <a:stretch>
+            <a:fillRect/>
+          </a:stretch>
+        </p:blipFill>
+        <p:spPr>
+          <a:xfrm>
+            <a:off x="8670607" y="3255962"/>
+            <a:ext cx="3178799" cy="3602038"/>
+          </a:xfrm>
+          <a:prstGeom prst="rect">
+            <a:avLst/>
+          </a:prstGeom>
+        </p:spPr>
+      </p:pic>
     </p:spTree>
     <p:extLst>
       <p:ext uri="{BB962C8B-B14F-4D97-AF65-F5344CB8AC3E}">

--- a/爆チャリ.pptx
+++ b/爆チャリ.pptx
@@ -243,7 +243,7 @@
           <a:p>
             <a:fld id="{B0A8AC16-9C99-4DAF-B857-3E0C6295AE9F}" type="datetimeFigureOut">
               <a:rPr kumimoji="1" lang="ja-JP" altLang="en-US" smtClean="0"/>
-              <a:t>2026/4/17</a:t>
+              <a:t>2026/4/20</a:t>
             </a:fld>
             <a:endParaRPr kumimoji="1" lang="ja-JP" altLang="en-US"/>
           </a:p>
@@ -443,7 +443,7 @@
           <a:p>
             <a:fld id="{B0A8AC16-9C99-4DAF-B857-3E0C6295AE9F}" type="datetimeFigureOut">
               <a:rPr kumimoji="1" lang="ja-JP" altLang="en-US" smtClean="0"/>
-              <a:t>2026/4/17</a:t>
+              <a:t>2026/4/20</a:t>
             </a:fld>
             <a:endParaRPr kumimoji="1" lang="ja-JP" altLang="en-US"/>
           </a:p>
@@ -653,7 +653,7 @@
           <a:p>
             <a:fld id="{B0A8AC16-9C99-4DAF-B857-3E0C6295AE9F}" type="datetimeFigureOut">
               <a:rPr kumimoji="1" lang="ja-JP" altLang="en-US" smtClean="0"/>
-              <a:t>2026/4/17</a:t>
+              <a:t>2026/4/20</a:t>
             </a:fld>
             <a:endParaRPr kumimoji="1" lang="ja-JP" altLang="en-US"/>
           </a:p>
@@ -853,7 +853,7 @@
           <a:p>
             <a:fld id="{B0A8AC16-9C99-4DAF-B857-3E0C6295AE9F}" type="datetimeFigureOut">
               <a:rPr kumimoji="1" lang="ja-JP" altLang="en-US" smtClean="0"/>
-              <a:t>2026/4/17</a:t>
+              <a:t>2026/4/20</a:t>
             </a:fld>
             <a:endParaRPr kumimoji="1" lang="ja-JP" altLang="en-US"/>
           </a:p>
@@ -1098,7 +1098,7 @@
           <a:p>
             <a:fld id="{B0A8AC16-9C99-4DAF-B857-3E0C6295AE9F}" type="datetimeFigureOut">
               <a:rPr kumimoji="1" lang="ja-JP" altLang="en-US" smtClean="0"/>
-              <a:t>2026/4/17</a:t>
+              <a:t>2026/4/20</a:t>
             </a:fld>
             <a:endParaRPr kumimoji="1" lang="ja-JP" altLang="en-US"/>
           </a:p>
@@ -1391,7 +1391,7 @@
           <a:p>
             <a:fld id="{B0A8AC16-9C99-4DAF-B857-3E0C6295AE9F}" type="datetimeFigureOut">
               <a:rPr kumimoji="1" lang="ja-JP" altLang="en-US" smtClean="0"/>
-              <a:t>2026/4/17</a:t>
+              <a:t>2026/4/20</a:t>
             </a:fld>
             <a:endParaRPr kumimoji="1" lang="ja-JP" altLang="en-US"/>
           </a:p>
@@ -1819,7 +1819,7 @@
           <a:p>
             <a:fld id="{B0A8AC16-9C99-4DAF-B857-3E0C6295AE9F}" type="datetimeFigureOut">
               <a:rPr kumimoji="1" lang="ja-JP" altLang="en-US" smtClean="0"/>
-              <a:t>2026/4/17</a:t>
+              <a:t>2026/4/20</a:t>
             </a:fld>
             <a:endParaRPr kumimoji="1" lang="ja-JP" altLang="en-US"/>
           </a:p>
@@ -1936,7 +1936,7 @@
           <a:p>
             <a:fld id="{B0A8AC16-9C99-4DAF-B857-3E0C6295AE9F}" type="datetimeFigureOut">
               <a:rPr kumimoji="1" lang="ja-JP" altLang="en-US" smtClean="0"/>
-              <a:t>2026/4/17</a:t>
+              <a:t>2026/4/20</a:t>
             </a:fld>
             <a:endParaRPr kumimoji="1" lang="ja-JP" altLang="en-US"/>
           </a:p>
@@ -2031,7 +2031,7 @@
           <a:p>
             <a:fld id="{B0A8AC16-9C99-4DAF-B857-3E0C6295AE9F}" type="datetimeFigureOut">
               <a:rPr kumimoji="1" lang="ja-JP" altLang="en-US" smtClean="0"/>
-              <a:t>2026/4/17</a:t>
+              <a:t>2026/4/20</a:t>
             </a:fld>
             <a:endParaRPr kumimoji="1" lang="ja-JP" altLang="en-US"/>
           </a:p>
@@ -2338,7 +2338,7 @@
           <a:p>
             <a:fld id="{B0A8AC16-9C99-4DAF-B857-3E0C6295AE9F}" type="datetimeFigureOut">
               <a:rPr kumimoji="1" lang="ja-JP" altLang="en-US" smtClean="0"/>
-              <a:t>2026/4/17</a:t>
+              <a:t>2026/4/20</a:t>
             </a:fld>
             <a:endParaRPr kumimoji="1" lang="ja-JP" altLang="en-US"/>
           </a:p>
@@ -2590,7 +2590,7 @@
           <a:p>
             <a:fld id="{B0A8AC16-9C99-4DAF-B857-3E0C6295AE9F}" type="datetimeFigureOut">
               <a:rPr kumimoji="1" lang="ja-JP" altLang="en-US" smtClean="0"/>
-              <a:t>2026/4/17</a:t>
+              <a:t>2026/4/20</a:t>
             </a:fld>
             <a:endParaRPr kumimoji="1" lang="ja-JP" altLang="en-US"/>
           </a:p>
@@ -2833,7 +2833,7 @@
           <a:p>
             <a:fld id="{B0A8AC16-9C99-4DAF-B857-3E0C6295AE9F}" type="datetimeFigureOut">
               <a:rPr kumimoji="1" lang="ja-JP" altLang="en-US" smtClean="0"/>
-              <a:t>2026/4/17</a:t>
+              <a:t>2026/4/20</a:t>
             </a:fld>
             <a:endParaRPr kumimoji="1" lang="ja-JP" altLang="en-US"/>
           </a:p>
@@ -3282,8 +3282,13 @@
           <a:p>
             <a:r>
               <a:rPr kumimoji="1" lang="ja-JP" altLang="en-US" dirty="0"/>
-              <a:t>川﨑、中西</a:t>
-            </a:r>
+              <a:t>川</a:t>
+            </a:r>
+            <a:r>
+              <a:rPr kumimoji="1" lang="ja-JP" altLang="en-US" dirty="0" smtClean="0"/>
+              <a:t>﨑、中西</a:t>
+            </a:r>
+            <a:endParaRPr kumimoji="1" lang="ja-JP" altLang="en-US" dirty="0"/>
           </a:p>
         </p:txBody>
       </p:sp>
@@ -3315,7 +3320,7 @@
         </p:blipFill>
         <p:spPr>
           <a:xfrm>
-            <a:off x="8670607" y="3255962"/>
+            <a:off x="9013201" y="3255962"/>
             <a:ext cx="3178799" cy="3602038"/>
           </a:xfrm>
           <a:prstGeom prst="rect">
@@ -3394,7 +3399,7 @@
         </p:nvSpPr>
         <p:spPr>
           <a:xfrm>
-            <a:off x="578141" y="1792069"/>
+            <a:off x="552974" y="2018572"/>
             <a:ext cx="10515600" cy="4351338"/>
           </a:xfrm>
         </p:spPr>
@@ -3482,7 +3487,7 @@
         </p:blipFill>
         <p:spPr>
           <a:xfrm>
-            <a:off x="8670607" y="3255962"/>
+            <a:off x="9013201" y="3255962"/>
             <a:ext cx="3178799" cy="3602038"/>
           </a:xfrm>
           <a:prstGeom prst="rect">
@@ -3565,41 +3570,81 @@
           </a:p>
           <a:p>
             <a:r>
-              <a:rPr kumimoji="1" lang="ja-JP" altLang="en-US" dirty="0"/>
-              <a:t>プレイヤーの体が</a:t>
-            </a:r>
+              <a:rPr kumimoji="1" lang="ja-JP" altLang="en-US" dirty="0" smtClean="0"/>
+              <a:t>スタミナを消費してダッシュができる（時間経過で回復）</a:t>
+            </a:r>
+            <a:endParaRPr kumimoji="1" lang="en-US" altLang="ja-JP" dirty="0" smtClean="0"/>
+          </a:p>
+          <a:p>
             <a:r>
               <a:rPr lang="ja-JP" altLang="en-US" dirty="0"/>
-              <a:t>ふにゃふにゃ</a:t>
-            </a:r>
-            <a:endParaRPr kumimoji="1" lang="en-US" altLang="ja-JP" dirty="0"/>
-          </a:p>
-          <a:p>
-            <a:r>
-              <a:rPr kumimoji="1" lang="ja-JP" altLang="en-US" dirty="0"/>
-              <a:t>プレイヤーが転倒しないようにスピード調節しながらバランスをとる</a:t>
-            </a:r>
-            <a:endParaRPr kumimoji="1" lang="en-US" altLang="ja-JP" dirty="0"/>
+              <a:t>スタミナ</a:t>
+            </a:r>
+            <a:r>
+              <a:rPr lang="ja-JP" altLang="en-US" dirty="0" smtClean="0"/>
+              <a:t>が０になると移動が遅くなる</a:t>
+            </a:r>
+            <a:endParaRPr lang="en-US" altLang="ja-JP" dirty="0" smtClean="0"/>
           </a:p>
           <a:p>
             <a:r>
               <a:rPr lang="ja-JP" altLang="en-US" dirty="0"/>
-              <a:t>頭をぶつけたら</a:t>
-            </a:r>
-            <a:r>
-              <a:rPr kumimoji="1" lang="ja-JP" altLang="en-US" dirty="0"/>
+              <a:t>時間</a:t>
+            </a:r>
+            <a:r>
+              <a:rPr lang="ja-JP" altLang="en-US" dirty="0" smtClean="0"/>
+              <a:t>制限がありダッシュをうまく使うのが大切</a:t>
+            </a:r>
+            <a:endParaRPr lang="en-US" altLang="ja-JP" dirty="0" smtClean="0"/>
+          </a:p>
+          <a:p>
+            <a:r>
+              <a:rPr kumimoji="1" lang="ja-JP" altLang="en-US" dirty="0" smtClean="0"/>
+              <a:t>プレイヤーが</a:t>
+            </a:r>
+            <a:r>
+              <a:rPr kumimoji="1" lang="ja-JP" altLang="en-US" dirty="0" smtClean="0"/>
+              <a:t>転倒</a:t>
+            </a:r>
+            <a:r>
+              <a:rPr lang="ja-JP" altLang="en-US" dirty="0"/>
+              <a:t>する</a:t>
+            </a:r>
+            <a:r>
+              <a:rPr lang="ja-JP" altLang="en-US" dirty="0" smtClean="0"/>
+              <a:t>と</a:t>
+            </a:r>
+            <a:r>
+              <a:rPr lang="ja-JP" altLang="en-US" dirty="0" smtClean="0">
+                <a:solidFill>
+                  <a:srgbClr val="FF0000"/>
+                </a:solidFill>
+              </a:rPr>
               <a:t>ゲームオーバー</a:t>
             </a:r>
-            <a:endParaRPr kumimoji="1" lang="en-US" altLang="ja-JP" dirty="0"/>
-          </a:p>
-          <a:p>
-            <a:endParaRPr kumimoji="1" lang="en-US" altLang="ja-JP" dirty="0"/>
-          </a:p>
-          <a:p>
-            <a:endParaRPr kumimoji="1" lang="en-US" altLang="ja-JP" dirty="0"/>
-          </a:p>
-          <a:p>
-            <a:endParaRPr kumimoji="1" lang="ja-JP" altLang="en-US" dirty="0"/>
+            <a:r>
+              <a:rPr lang="ja-JP" altLang="en-US" dirty="0" smtClean="0"/>
+              <a:t>になる。</a:t>
+            </a:r>
+            <a:endParaRPr lang="en-US" altLang="ja-JP" dirty="0" smtClean="0"/>
+          </a:p>
+          <a:p>
+            <a:pPr marL="0" indent="0">
+              <a:buNone/>
+            </a:pPr>
+            <a:r>
+              <a:rPr kumimoji="1" lang="en-US" altLang="ja-JP" dirty="0"/>
+              <a:t> </a:t>
+            </a:r>
+            <a:r>
+              <a:rPr kumimoji="1" lang="en-US" altLang="ja-JP" dirty="0" smtClean="0"/>
+              <a:t>  </a:t>
+            </a:r>
+            <a:r>
+              <a:rPr kumimoji="1" lang="ja-JP" altLang="en-US" dirty="0" smtClean="0"/>
+              <a:t>スピード調節しながらバランスをとる</a:t>
+            </a:r>
+            <a:endParaRPr kumimoji="1" lang="en-US" altLang="ja-JP" dirty="0" smtClean="0"/>
           </a:p>
         </p:txBody>
       </p:sp>
@@ -3631,7 +3676,7 @@
         </p:blipFill>
         <p:spPr>
           <a:xfrm>
-            <a:off x="8670607" y="3255962"/>
+            <a:off x="9013201" y="3255962"/>
             <a:ext cx="3178799" cy="3602038"/>
           </a:xfrm>
           <a:prstGeom prst="rect">

--- a/爆チャリ.pptx
+++ b/爆チャリ.pptx
@@ -8,6 +8,7 @@
     <p:sldId id="256" r:id="rId2"/>
     <p:sldId id="258" r:id="rId3"/>
     <p:sldId id="257" r:id="rId4"/>
+    <p:sldId id="259" r:id="rId5"/>
   </p:sldIdLst>
   <p:sldSz cx="12192000" cy="6858000"/>
   <p:notesSz cx="6858000" cy="9144000"/>
@@ -3254,7 +3255,7 @@
           <a:lstStyle/>
           <a:p>
             <a:r>
-              <a:rPr lang="ja-JP" altLang="en-US" dirty="0"/>
+              <a:rPr lang="ja-JP" altLang="en-US" sz="6600" b="1" dirty="0"/>
               <a:t>爆走チャリンコ</a:t>
             </a:r>
             <a:r>
@@ -3381,7 +3382,7 @@
           <a:lstStyle/>
           <a:p>
             <a:r>
-              <a:rPr kumimoji="1" lang="ja-JP" altLang="en-US" sz="7200" dirty="0"/>
+              <a:rPr lang="ja-JP" altLang="en-US" sz="5400" b="1" dirty="0"/>
               <a:t>ゲーム概要</a:t>
             </a:r>
           </a:p>
@@ -3537,11 +3538,13 @@
         </p:nvSpPr>
         <p:spPr/>
         <p:txBody>
-          <a:bodyPr/>
-          <a:lstStyle/>
-          <a:p>
-            <a:r>
-              <a:rPr kumimoji="1" lang="ja-JP" altLang="en-US" dirty="0"/>
+          <a:bodyPr>
+            <a:normAutofit/>
+          </a:bodyPr>
+          <a:lstStyle/>
+          <a:p>
+            <a:r>
+              <a:rPr kumimoji="1" lang="ja-JP" altLang="en-US" sz="5400" b="1" dirty="0"/>
               <a:t>ゲーム説明</a:t>
             </a:r>
           </a:p>
@@ -3557,65 +3560,72 @@
             <p:ph idx="1"/>
           </p:nvPr>
         </p:nvSpPr>
-        <p:spPr/>
-        <p:txBody>
-          <a:bodyPr/>
-          <a:lstStyle/>
-          <a:p>
-            <a:r>
-              <a:rPr kumimoji="1" lang="ja-JP" altLang="en-US" dirty="0"/>
+        <p:spPr>
+          <a:xfrm>
+            <a:off x="636863" y="1926293"/>
+            <a:ext cx="11082556" cy="4351338"/>
+          </a:xfrm>
+        </p:spPr>
+        <p:txBody>
+          <a:bodyPr>
+            <a:normAutofit/>
+          </a:bodyPr>
+          <a:lstStyle/>
+          <a:p>
+            <a:r>
+              <a:rPr kumimoji="1" lang="ja-JP" altLang="en-US" sz="3200" dirty="0"/>
               <a:t>自転車に乗りながらゴールを目指す</a:t>
             </a:r>
-            <a:endParaRPr kumimoji="1" lang="en-US" altLang="ja-JP" dirty="0"/>
-          </a:p>
-          <a:p>
-            <a:r>
-              <a:rPr kumimoji="1" lang="ja-JP" altLang="en-US" dirty="0" smtClean="0"/>
+            <a:endParaRPr kumimoji="1" lang="en-US" altLang="ja-JP" sz="3200" dirty="0"/>
+          </a:p>
+          <a:p>
+            <a:r>
+              <a:rPr kumimoji="1" lang="ja-JP" altLang="en-US" sz="3200" dirty="0" smtClean="0"/>
               <a:t>スタミナを消費してダッシュができる（時間経過で回復）</a:t>
             </a:r>
-            <a:endParaRPr kumimoji="1" lang="en-US" altLang="ja-JP" dirty="0" smtClean="0"/>
-          </a:p>
-          <a:p>
-            <a:r>
-              <a:rPr lang="ja-JP" altLang="en-US" dirty="0"/>
+            <a:endParaRPr kumimoji="1" lang="en-US" altLang="ja-JP" sz="3200" dirty="0" smtClean="0"/>
+          </a:p>
+          <a:p>
+            <a:r>
+              <a:rPr lang="ja-JP" altLang="en-US" sz="3200" dirty="0"/>
               <a:t>スタミナ</a:t>
             </a:r>
             <a:r>
-              <a:rPr lang="ja-JP" altLang="en-US" dirty="0" smtClean="0"/>
-              <a:t>が０になると移動が遅くなる</a:t>
-            </a:r>
-            <a:endParaRPr lang="en-US" altLang="ja-JP" dirty="0" smtClean="0"/>
-          </a:p>
-          <a:p>
-            <a:r>
-              <a:rPr lang="ja-JP" altLang="en-US" dirty="0"/>
+              <a:rPr lang="ja-JP" altLang="en-US" sz="3200" dirty="0" smtClean="0"/>
+              <a:t>が０になる</a:t>
+            </a:r>
+            <a:r>
+              <a:rPr lang="ja-JP" altLang="en-US" sz="3200" dirty="0" smtClean="0"/>
+              <a:t>と回復するまで操作不能になる</a:t>
+            </a:r>
+            <a:endParaRPr lang="en-US" altLang="ja-JP" sz="3200" dirty="0" smtClean="0"/>
+          </a:p>
+          <a:p>
+            <a:r>
+              <a:rPr lang="ja-JP" altLang="en-US" sz="3200" dirty="0" smtClean="0"/>
               <a:t>時間</a:t>
             </a:r>
             <a:r>
-              <a:rPr lang="ja-JP" altLang="en-US" dirty="0" smtClean="0"/>
+              <a:rPr lang="ja-JP" altLang="en-US" sz="3200" dirty="0" smtClean="0"/>
               <a:t>制限がありダッシュをうまく使うのが大切</a:t>
             </a:r>
-            <a:endParaRPr lang="en-US" altLang="ja-JP" dirty="0" smtClean="0"/>
-          </a:p>
-          <a:p>
-            <a:r>
-              <a:rPr kumimoji="1" lang="ja-JP" altLang="en-US" dirty="0" smtClean="0"/>
-              <a:t>プレイヤーが</a:t>
-            </a:r>
-            <a:r>
-              <a:rPr kumimoji="1" lang="ja-JP" altLang="en-US" dirty="0" smtClean="0"/>
-              <a:t>転倒</a:t>
-            </a:r>
-            <a:r>
-              <a:rPr lang="ja-JP" altLang="en-US" dirty="0"/>
+            <a:endParaRPr lang="en-US" altLang="ja-JP" sz="3200" dirty="0" smtClean="0"/>
+          </a:p>
+          <a:p>
+            <a:r>
+              <a:rPr kumimoji="1" lang="ja-JP" altLang="en-US" sz="3200" dirty="0" smtClean="0"/>
+              <a:t>プレイヤーが転倒</a:t>
+            </a:r>
+            <a:r>
+              <a:rPr lang="ja-JP" altLang="en-US" sz="3200" dirty="0"/>
               <a:t>する</a:t>
             </a:r>
             <a:r>
-              <a:rPr lang="ja-JP" altLang="en-US" dirty="0" smtClean="0"/>
+              <a:rPr lang="ja-JP" altLang="en-US" sz="3200" dirty="0" smtClean="0"/>
               <a:t>と</a:t>
             </a:r>
             <a:r>
-              <a:rPr lang="ja-JP" altLang="en-US" dirty="0" smtClean="0">
+              <a:rPr lang="ja-JP" altLang="en-US" sz="3200" dirty="0" smtClean="0">
                 <a:solidFill>
                   <a:srgbClr val="FF0000"/>
                 </a:solidFill>
@@ -3623,28 +3633,14 @@
               <a:t>ゲームオーバー</a:t>
             </a:r>
             <a:r>
-              <a:rPr lang="ja-JP" altLang="en-US" dirty="0" smtClean="0"/>
-              <a:t>になる。</a:t>
-            </a:r>
-            <a:endParaRPr lang="en-US" altLang="ja-JP" dirty="0" smtClean="0"/>
-          </a:p>
-          <a:p>
-            <a:pPr marL="0" indent="0">
-              <a:buNone/>
-            </a:pPr>
-            <a:r>
-              <a:rPr kumimoji="1" lang="en-US" altLang="ja-JP" dirty="0"/>
-              <a:t> </a:t>
-            </a:r>
-            <a:r>
-              <a:rPr kumimoji="1" lang="en-US" altLang="ja-JP" dirty="0" smtClean="0"/>
-              <a:t>  </a:t>
-            </a:r>
-            <a:r>
-              <a:rPr kumimoji="1" lang="ja-JP" altLang="en-US" dirty="0" smtClean="0"/>
-              <a:t>スピード調節しながらバランスをとる</a:t>
-            </a:r>
-            <a:endParaRPr kumimoji="1" lang="en-US" altLang="ja-JP" dirty="0" smtClean="0"/>
+              <a:rPr lang="ja-JP" altLang="en-US" sz="3200" dirty="0" smtClean="0"/>
+              <a:t>に</a:t>
+            </a:r>
+            <a:r>
+              <a:rPr lang="ja-JP" altLang="en-US" sz="3200" dirty="0" smtClean="0"/>
+              <a:t>なる</a:t>
+            </a:r>
+            <a:endParaRPr lang="en-US" altLang="ja-JP" sz="3200" dirty="0" smtClean="0"/>
           </a:p>
         </p:txBody>
       </p:sp>
@@ -3688,6 +3684,141 @@
     <p:extLst>
       <p:ext uri="{BB962C8B-B14F-4D97-AF65-F5344CB8AC3E}">
         <p14:creationId xmlns:p14="http://schemas.microsoft.com/office/powerpoint/2010/main" val="3497462383"/>
+      </p:ext>
+    </p:extLst>
+  </p:cSld>
+  <p:clrMapOvr>
+    <a:masterClrMapping/>
+  </p:clrMapOvr>
+</p:sld>
+</file>
+
+<file path=ppt/slides/slide4.xml><?xml version="1.0" encoding="utf-8"?>
+<p:sld xmlns:a="http://schemas.openxmlformats.org/drawingml/2006/main" xmlns:r="http://schemas.openxmlformats.org/officeDocument/2006/relationships" xmlns:p="http://schemas.openxmlformats.org/presentationml/2006/main">
+  <p:cSld>
+    <p:spTree>
+      <p:nvGrpSpPr>
+        <p:cNvPr id="1" name=""/>
+        <p:cNvGrpSpPr/>
+        <p:nvPr/>
+      </p:nvGrpSpPr>
+      <p:grpSpPr>
+        <a:xfrm>
+          <a:off x="0" y="0"/>
+          <a:ext cx="0" cy="0"/>
+          <a:chOff x="0" y="0"/>
+          <a:chExt cx="0" cy="0"/>
+        </a:xfrm>
+      </p:grpSpPr>
+      <p:sp>
+        <p:nvSpPr>
+          <p:cNvPr id="2" name="タイトル 1"/>
+          <p:cNvSpPr>
+            <a:spLocks noGrp="1"/>
+          </p:cNvSpPr>
+          <p:nvPr>
+            <p:ph type="title"/>
+          </p:nvPr>
+        </p:nvSpPr>
+        <p:spPr/>
+        <p:txBody>
+          <a:bodyPr>
+            <a:normAutofit/>
+          </a:bodyPr>
+          <a:lstStyle/>
+          <a:p>
+            <a:r>
+              <a:rPr kumimoji="1" lang="ja-JP" altLang="en-US" sz="5400" b="1" dirty="0" smtClean="0"/>
+              <a:t>面白い点</a:t>
+            </a:r>
+            <a:endParaRPr kumimoji="1" lang="ja-JP" altLang="en-US" sz="5400" b="1" dirty="0"/>
+          </a:p>
+        </p:txBody>
+      </p:sp>
+      <p:sp>
+        <p:nvSpPr>
+          <p:cNvPr id="3" name="コンテンツ プレースホルダー 2"/>
+          <p:cNvSpPr>
+            <a:spLocks noGrp="1"/>
+          </p:cNvSpPr>
+          <p:nvPr>
+            <p:ph idx="1"/>
+          </p:nvPr>
+        </p:nvSpPr>
+        <p:spPr>
+          <a:xfrm>
+            <a:off x="762699" y="2396076"/>
+            <a:ext cx="10515600" cy="4351338"/>
+          </a:xfrm>
+        </p:spPr>
+        <p:txBody>
+          <a:bodyPr>
+            <a:normAutofit/>
+          </a:bodyPr>
+          <a:lstStyle/>
+          <a:p>
+            <a:r>
+              <a:rPr kumimoji="1" lang="ja-JP" altLang="en-US" sz="3600" dirty="0" smtClean="0"/>
+              <a:t>プレイヤーのバランスを取りながら進む点。</a:t>
+            </a:r>
+            <a:endParaRPr kumimoji="1" lang="en-US" altLang="ja-JP" sz="3600" dirty="0" smtClean="0"/>
+          </a:p>
+          <a:p>
+            <a:r>
+              <a:rPr lang="ja-JP" altLang="en-US" sz="3600" dirty="0" smtClean="0"/>
+              <a:t>ダッシュを使うことで爆走できることができる。</a:t>
+            </a:r>
+            <a:endParaRPr lang="en-US" altLang="ja-JP" sz="3600" dirty="0" smtClean="0"/>
+          </a:p>
+          <a:p>
+            <a:r>
+              <a:rPr kumimoji="1" lang="ja-JP" altLang="en-US" sz="3600" dirty="0" smtClean="0"/>
+              <a:t>時間制限があるのでハラハラ感が味わえる。</a:t>
+            </a:r>
+            <a:endParaRPr kumimoji="1" lang="en-US" altLang="ja-JP" sz="3600" dirty="0" smtClean="0"/>
+          </a:p>
+        </p:txBody>
+      </p:sp>
+      <p:pic>
+        <p:nvPicPr>
+          <p:cNvPr id="4" name="図 3">
+            <a:extLst>
+              <a:ext uri="{FF2B5EF4-FFF2-40B4-BE49-F238E27FC236}">
+                <a16:creationId xmlns:a16="http://schemas.microsoft.com/office/drawing/2014/main" id="{40663752-4E96-B5D5-EAF2-30BBC178937B}"/>
+              </a:ext>
+            </a:extLst>
+          </p:cNvPr>
+          <p:cNvPicPr>
+            <a:picLocks noChangeAspect="1"/>
+          </p:cNvPicPr>
+          <p:nvPr/>
+        </p:nvPicPr>
+        <p:blipFill>
+          <a:blip r:embed="rId2">
+            <a:extLst>
+              <a:ext uri="{28A0092B-C50C-407E-A947-70E740481C1C}">
+                <a14:useLocalDpi xmlns:a14="http://schemas.microsoft.com/office/drawing/2010/main" val="0"/>
+              </a:ext>
+            </a:extLst>
+          </a:blip>
+          <a:stretch>
+            <a:fillRect/>
+          </a:stretch>
+        </p:blipFill>
+        <p:spPr>
+          <a:xfrm>
+            <a:off x="9013201" y="3255962"/>
+            <a:ext cx="3178799" cy="3602038"/>
+          </a:xfrm>
+          <a:prstGeom prst="rect">
+            <a:avLst/>
+          </a:prstGeom>
+        </p:spPr>
+      </p:pic>
+    </p:spTree>
+    <p:extLst>
+      <p:ext uri="{BB962C8B-B14F-4D97-AF65-F5344CB8AC3E}">
+        <p14:creationId xmlns:p14="http://schemas.microsoft.com/office/powerpoint/2010/main" val="4125247803"/>
       </p:ext>
     </p:extLst>
   </p:cSld>

--- a/爆チャリ.pptx
+++ b/爆チャリ.pptx
@@ -3339,6 +3339,13 @@
   <p:clrMapOvr>
     <a:masterClrMapping/>
   </p:clrMapOvr>
+  <p:timing>
+    <p:tnLst>
+      <p:par>
+        <p:cTn id="1" dur="indefinite" restart="never" nodeType="tmRoot"/>
+      </p:par>
+    </p:tnLst>
+  </p:timing>
 </p:sld>
 </file>
 
@@ -3506,6 +3513,13 @@
   <p:clrMapOvr>
     <a:masterClrMapping/>
   </p:clrMapOvr>
+  <p:timing>
+    <p:tnLst>
+      <p:par>
+        <p:cTn id="1" dur="indefinite" restart="never" nodeType="tmRoot"/>
+      </p:par>
+    </p:tnLst>
+  </p:timing>
 </p:sld>
 </file>
 
@@ -3592,22 +3606,14 @@
             </a:r>
             <a:r>
               <a:rPr lang="ja-JP" altLang="en-US" sz="3200" dirty="0" smtClean="0"/>
-              <a:t>が０になる</a:t>
-            </a:r>
+              <a:t>が０になると回復するまで操作不能になる</a:t>
+            </a:r>
+            <a:endParaRPr lang="en-US" altLang="ja-JP" sz="3200" dirty="0" smtClean="0"/>
+          </a:p>
+          <a:p>
             <a:r>
               <a:rPr lang="ja-JP" altLang="en-US" sz="3200" dirty="0" smtClean="0"/>
-              <a:t>と回復するまで操作不能になる</a:t>
-            </a:r>
-            <a:endParaRPr lang="en-US" altLang="ja-JP" sz="3200" dirty="0" smtClean="0"/>
-          </a:p>
-          <a:p>
-            <a:r>
-              <a:rPr lang="ja-JP" altLang="en-US" sz="3200" dirty="0" smtClean="0"/>
-              <a:t>時間</a:t>
-            </a:r>
-            <a:r>
-              <a:rPr lang="ja-JP" altLang="en-US" sz="3200" dirty="0" smtClean="0"/>
-              <a:t>制限がありダッシュをうまく使うのが大切</a:t>
+              <a:t>時間制限がありダッシュをうまく使うのが大切</a:t>
             </a:r>
             <a:endParaRPr lang="en-US" altLang="ja-JP" sz="3200" dirty="0" smtClean="0"/>
           </a:p>
@@ -3634,11 +3640,7 @@
             </a:r>
             <a:r>
               <a:rPr lang="ja-JP" altLang="en-US" sz="3200" dirty="0" smtClean="0"/>
-              <a:t>に</a:t>
-            </a:r>
-            <a:r>
-              <a:rPr lang="ja-JP" altLang="en-US" sz="3200" dirty="0" smtClean="0"/>
-              <a:t>なる</a:t>
+              <a:t>になる</a:t>
             </a:r>
             <a:endParaRPr lang="en-US" altLang="ja-JP" sz="3200" dirty="0" smtClean="0"/>
           </a:p>
@@ -3690,6 +3692,13 @@
   <p:clrMapOvr>
     <a:masterClrMapping/>
   </p:clrMapOvr>
+  <p:timing>
+    <p:tnLst>
+      <p:par>
+        <p:cTn id="1" dur="indefinite" restart="never" nodeType="tmRoot"/>
+      </p:par>
+    </p:tnLst>
+  </p:timing>
 </p:sld>
 </file>
 
@@ -3766,7 +3775,15 @@
           <a:p>
             <a:r>
               <a:rPr lang="ja-JP" altLang="en-US" sz="3600" dirty="0" smtClean="0"/>
-              <a:t>ダッシュを使うことで爆走できることができる。</a:t>
+              <a:t>ダッシュを使うことで爆走</a:t>
+            </a:r>
+            <a:r>
+              <a:rPr lang="ja-JP" altLang="en-US" sz="3600" dirty="0" smtClean="0"/>
+              <a:t>できる</a:t>
+            </a:r>
+            <a:r>
+              <a:rPr lang="ja-JP" altLang="en-US" sz="3600" dirty="0"/>
+              <a:t>。</a:t>
             </a:r>
             <a:endParaRPr lang="en-US" altLang="ja-JP" sz="3600" dirty="0" smtClean="0"/>
           </a:p>
@@ -3825,6 +3842,13 @@
   <p:clrMapOvr>
     <a:masterClrMapping/>
   </p:clrMapOvr>
+  <p:timing>
+    <p:tnLst>
+      <p:par>
+        <p:cTn id="1" dur="indefinite" restart="never" nodeType="tmRoot"/>
+      </p:par>
+    </p:tnLst>
+  </p:timing>
 </p:sld>
 </file>
 

--- a/爆チャリ.pptx
+++ b/爆チャリ.pptx
@@ -6,7 +6,7 @@
   </p:sldMasterIdLst>
   <p:sldIdLst>
     <p:sldId id="256" r:id="rId2"/>
-    <p:sldId id="258" r:id="rId3"/>
+    <p:sldId id="260" r:id="rId3"/>
     <p:sldId id="257" r:id="rId4"/>
     <p:sldId id="259" r:id="rId5"/>
   </p:sldIdLst>
@@ -244,7 +244,7 @@
           <a:p>
             <a:fld id="{B0A8AC16-9C99-4DAF-B857-3E0C6295AE9F}" type="datetimeFigureOut">
               <a:rPr kumimoji="1" lang="ja-JP" altLang="en-US" smtClean="0"/>
-              <a:t>2026/4/20</a:t>
+              <a:t>2026/7/27</a:t>
             </a:fld>
             <a:endParaRPr kumimoji="1" lang="ja-JP" altLang="en-US"/>
           </a:p>
@@ -444,7 +444,7 @@
           <a:p>
             <a:fld id="{B0A8AC16-9C99-4DAF-B857-3E0C6295AE9F}" type="datetimeFigureOut">
               <a:rPr kumimoji="1" lang="ja-JP" altLang="en-US" smtClean="0"/>
-              <a:t>2026/4/20</a:t>
+              <a:t>2026/7/27</a:t>
             </a:fld>
             <a:endParaRPr kumimoji="1" lang="ja-JP" altLang="en-US"/>
           </a:p>
@@ -654,7 +654,7 @@
           <a:p>
             <a:fld id="{B0A8AC16-9C99-4DAF-B857-3E0C6295AE9F}" type="datetimeFigureOut">
               <a:rPr kumimoji="1" lang="ja-JP" altLang="en-US" smtClean="0"/>
-              <a:t>2026/4/20</a:t>
+              <a:t>2026/7/27</a:t>
             </a:fld>
             <a:endParaRPr kumimoji="1" lang="ja-JP" altLang="en-US"/>
           </a:p>
@@ -854,7 +854,7 @@
           <a:p>
             <a:fld id="{B0A8AC16-9C99-4DAF-B857-3E0C6295AE9F}" type="datetimeFigureOut">
               <a:rPr kumimoji="1" lang="ja-JP" altLang="en-US" smtClean="0"/>
-              <a:t>2026/4/20</a:t>
+              <a:t>2026/7/27</a:t>
             </a:fld>
             <a:endParaRPr kumimoji="1" lang="ja-JP" altLang="en-US"/>
           </a:p>
@@ -1099,7 +1099,7 @@
           <a:p>
             <a:fld id="{B0A8AC16-9C99-4DAF-B857-3E0C6295AE9F}" type="datetimeFigureOut">
               <a:rPr kumimoji="1" lang="ja-JP" altLang="en-US" smtClean="0"/>
-              <a:t>2026/4/20</a:t>
+              <a:t>2026/7/27</a:t>
             </a:fld>
             <a:endParaRPr kumimoji="1" lang="ja-JP" altLang="en-US"/>
           </a:p>
@@ -1392,7 +1392,7 @@
           <a:p>
             <a:fld id="{B0A8AC16-9C99-4DAF-B857-3E0C6295AE9F}" type="datetimeFigureOut">
               <a:rPr kumimoji="1" lang="ja-JP" altLang="en-US" smtClean="0"/>
-              <a:t>2026/4/20</a:t>
+              <a:t>2026/7/27</a:t>
             </a:fld>
             <a:endParaRPr kumimoji="1" lang="ja-JP" altLang="en-US"/>
           </a:p>
@@ -1820,7 +1820,7 @@
           <a:p>
             <a:fld id="{B0A8AC16-9C99-4DAF-B857-3E0C6295AE9F}" type="datetimeFigureOut">
               <a:rPr kumimoji="1" lang="ja-JP" altLang="en-US" smtClean="0"/>
-              <a:t>2026/4/20</a:t>
+              <a:t>2026/7/27</a:t>
             </a:fld>
             <a:endParaRPr kumimoji="1" lang="ja-JP" altLang="en-US"/>
           </a:p>
@@ -1937,7 +1937,7 @@
           <a:p>
             <a:fld id="{B0A8AC16-9C99-4DAF-B857-3E0C6295AE9F}" type="datetimeFigureOut">
               <a:rPr kumimoji="1" lang="ja-JP" altLang="en-US" smtClean="0"/>
-              <a:t>2026/4/20</a:t>
+              <a:t>2026/7/27</a:t>
             </a:fld>
             <a:endParaRPr kumimoji="1" lang="ja-JP" altLang="en-US"/>
           </a:p>
@@ -2032,7 +2032,7 @@
           <a:p>
             <a:fld id="{B0A8AC16-9C99-4DAF-B857-3E0C6295AE9F}" type="datetimeFigureOut">
               <a:rPr kumimoji="1" lang="ja-JP" altLang="en-US" smtClean="0"/>
-              <a:t>2026/4/20</a:t>
+              <a:t>2026/7/27</a:t>
             </a:fld>
             <a:endParaRPr kumimoji="1" lang="ja-JP" altLang="en-US"/>
           </a:p>
@@ -2339,7 +2339,7 @@
           <a:p>
             <a:fld id="{B0A8AC16-9C99-4DAF-B857-3E0C6295AE9F}" type="datetimeFigureOut">
               <a:rPr kumimoji="1" lang="ja-JP" altLang="en-US" smtClean="0"/>
-              <a:t>2026/4/20</a:t>
+              <a:t>2026/7/27</a:t>
             </a:fld>
             <a:endParaRPr kumimoji="1" lang="ja-JP" altLang="en-US"/>
           </a:p>
@@ -2591,7 +2591,7 @@
           <a:p>
             <a:fld id="{B0A8AC16-9C99-4DAF-B857-3E0C6295AE9F}" type="datetimeFigureOut">
               <a:rPr kumimoji="1" lang="ja-JP" altLang="en-US" smtClean="0"/>
-              <a:t>2026/4/20</a:t>
+              <a:t>2026/7/27</a:t>
             </a:fld>
             <a:endParaRPr kumimoji="1" lang="ja-JP" altLang="en-US"/>
           </a:p>
@@ -2834,7 +2834,7 @@
           <a:p>
             <a:fld id="{B0A8AC16-9C99-4DAF-B857-3E0C6295AE9F}" type="datetimeFigureOut">
               <a:rPr kumimoji="1" lang="ja-JP" altLang="en-US" smtClean="0"/>
-              <a:t>2026/4/20</a:t>
+              <a:t>2026/7/27</a:t>
             </a:fld>
             <a:endParaRPr kumimoji="1" lang="ja-JP" altLang="en-US"/>
           </a:p>
@@ -3239,76 +3239,16 @@
           <a:chExt cx="0" cy="0"/>
         </a:xfrm>
       </p:grpSpPr>
-      <p:sp>
-        <p:nvSpPr>
-          <p:cNvPr id="2" name="タイトル 1"/>
-          <p:cNvSpPr>
-            <a:spLocks noGrp="1"/>
-          </p:cNvSpPr>
-          <p:nvPr>
-            <p:ph type="ctrTitle"/>
-          </p:nvPr>
-        </p:nvSpPr>
-        <p:spPr/>
-        <p:txBody>
-          <a:bodyPr/>
-          <a:lstStyle/>
-          <a:p>
-            <a:r>
-              <a:rPr lang="ja-JP" altLang="en-US" sz="6600" b="1" dirty="0"/>
-              <a:t>爆走チャリンコ</a:t>
-            </a:r>
-            <a:r>
-              <a:rPr lang="ja-JP" altLang="en-US" sz="3600" dirty="0"/>
-              <a:t>（爆チャリ）</a:t>
-            </a:r>
-            <a:endParaRPr kumimoji="1" lang="ja-JP" altLang="en-US" dirty="0"/>
-          </a:p>
-        </p:txBody>
-      </p:sp>
-      <p:sp>
-        <p:nvSpPr>
-          <p:cNvPr id="3" name="サブタイトル 2"/>
-          <p:cNvSpPr>
-            <a:spLocks noGrp="1"/>
-          </p:cNvSpPr>
-          <p:nvPr>
-            <p:ph type="subTitle" idx="1"/>
-          </p:nvPr>
-        </p:nvSpPr>
-        <p:spPr/>
-        <p:txBody>
-          <a:bodyPr/>
-          <a:lstStyle/>
-          <a:p>
-            <a:r>
-              <a:rPr kumimoji="1" lang="ja-JP" altLang="en-US" dirty="0"/>
-              <a:t>川</a:t>
-            </a:r>
-            <a:r>
-              <a:rPr kumimoji="1" lang="ja-JP" altLang="en-US" dirty="0" smtClean="0"/>
-              <a:t>﨑、中西</a:t>
-            </a:r>
-            <a:endParaRPr kumimoji="1" lang="ja-JP" altLang="en-US" dirty="0"/>
-          </a:p>
-        </p:txBody>
-      </p:sp>
       <p:pic>
         <p:nvPicPr>
-          <p:cNvPr id="5" name="図 4">
-            <a:extLst>
-              <a:ext uri="{FF2B5EF4-FFF2-40B4-BE49-F238E27FC236}">
-                <a16:creationId xmlns:a16="http://schemas.microsoft.com/office/drawing/2014/main" id="{479BD962-3D05-1755-C7F4-CDA06864C5F9}"/>
-              </a:ext>
-            </a:extLst>
-          </p:cNvPr>
+          <p:cNvPr id="4" name="図 3"/>
           <p:cNvPicPr>
             <a:picLocks noChangeAspect="1"/>
           </p:cNvPicPr>
           <p:nvPr/>
         </p:nvPicPr>
         <p:blipFill>
-          <a:blip r:embed="rId2">
+          <a:blip r:embed="rId2" cstate="print">
             <a:extLst>
               <a:ext uri="{28A0092B-C50C-407E-A947-70E740481C1C}">
                 <a14:useLocalDpi xmlns:a14="http://schemas.microsoft.com/office/drawing/2010/main" val="0"/>
@@ -3321,8 +3261,380 @@
         </p:blipFill>
         <p:spPr>
           <a:xfrm>
-            <a:off x="9013201" y="3255962"/>
-            <a:ext cx="3178799" cy="3602038"/>
+            <a:off x="0" y="-128338"/>
+            <a:ext cx="12464716" cy="7519737"/>
+          </a:xfrm>
+          <a:prstGeom prst="rect">
+            <a:avLst/>
+          </a:prstGeom>
+        </p:spPr>
+      </p:pic>
+      <p:pic>
+        <p:nvPicPr>
+          <p:cNvPr id="7" name="図 6"/>
+          <p:cNvPicPr>
+            <a:picLocks noChangeAspect="1"/>
+          </p:cNvPicPr>
+          <p:nvPr/>
+        </p:nvPicPr>
+        <p:blipFill>
+          <a:blip r:embed="rId3" cstate="print">
+            <a:extLst>
+              <a:ext uri="{28A0092B-C50C-407E-A947-70E740481C1C}">
+                <a14:useLocalDpi xmlns:a14="http://schemas.microsoft.com/office/drawing/2010/main" val="0"/>
+              </a:ext>
+            </a:extLst>
+          </a:blip>
+          <a:stretch>
+            <a:fillRect/>
+          </a:stretch>
+        </p:blipFill>
+        <p:spPr>
+          <a:xfrm>
+            <a:off x="0" y="188686"/>
+            <a:ext cx="12464716" cy="7331049"/>
+          </a:xfrm>
+          <a:prstGeom prst="rect">
+            <a:avLst/>
+          </a:prstGeom>
+        </p:spPr>
+      </p:pic>
+      <p:pic>
+        <p:nvPicPr>
+          <p:cNvPr id="6" name="図 5"/>
+          <p:cNvPicPr>
+            <a:picLocks noChangeAspect="1"/>
+          </p:cNvPicPr>
+          <p:nvPr/>
+        </p:nvPicPr>
+        <p:blipFill>
+          <a:blip r:embed="rId4" cstate="print">
+            <a:extLst>
+              <a:ext uri="{28A0092B-C50C-407E-A947-70E740481C1C}">
+                <a14:useLocalDpi xmlns:a14="http://schemas.microsoft.com/office/drawing/2010/main" val="0"/>
+              </a:ext>
+            </a:extLst>
+          </a:blip>
+          <a:stretch>
+            <a:fillRect/>
+          </a:stretch>
+        </p:blipFill>
+        <p:spPr>
+          <a:xfrm>
+            <a:off x="0" y="-1"/>
+            <a:ext cx="12464716" cy="7391399"/>
+          </a:xfrm>
+          <a:prstGeom prst="rect">
+            <a:avLst/>
+          </a:prstGeom>
+        </p:spPr>
+      </p:pic>
+      <p:pic>
+        <p:nvPicPr>
+          <p:cNvPr id="8" name="図 7"/>
+          <p:cNvPicPr>
+            <a:picLocks noChangeAspect="1"/>
+          </p:cNvPicPr>
+          <p:nvPr/>
+        </p:nvPicPr>
+        <p:blipFill>
+          <a:blip r:embed="rId5" cstate="print">
+            <a:extLst>
+              <a:ext uri="{28A0092B-C50C-407E-A947-70E740481C1C}">
+                <a14:useLocalDpi xmlns:a14="http://schemas.microsoft.com/office/drawing/2010/main" val="0"/>
+              </a:ext>
+            </a:extLst>
+          </a:blip>
+          <a:stretch>
+            <a:fillRect/>
+          </a:stretch>
+        </p:blipFill>
+        <p:spPr>
+          <a:xfrm>
+            <a:off x="0" y="1381919"/>
+            <a:ext cx="12464716" cy="6096000"/>
+          </a:xfrm>
+          <a:prstGeom prst="rect">
+            <a:avLst/>
+          </a:prstGeom>
+        </p:spPr>
+      </p:pic>
+      <p:pic>
+        <p:nvPicPr>
+          <p:cNvPr id="9" name="図 8"/>
+          <p:cNvPicPr>
+            <a:picLocks noChangeAspect="1"/>
+          </p:cNvPicPr>
+          <p:nvPr/>
+        </p:nvPicPr>
+        <p:blipFill>
+          <a:blip r:embed="rId6" cstate="print">
+            <a:extLst>
+              <a:ext uri="{28A0092B-C50C-407E-A947-70E740481C1C}">
+                <a14:useLocalDpi xmlns:a14="http://schemas.microsoft.com/office/drawing/2010/main" val="0"/>
+              </a:ext>
+            </a:extLst>
+          </a:blip>
+          <a:stretch>
+            <a:fillRect/>
+          </a:stretch>
+        </p:blipFill>
+        <p:spPr>
+          <a:xfrm>
+            <a:off x="0" y="1423735"/>
+            <a:ext cx="12464716" cy="6096000"/>
+          </a:xfrm>
+          <a:prstGeom prst="rect">
+            <a:avLst/>
+          </a:prstGeom>
+        </p:spPr>
+      </p:pic>
+      <p:sp>
+        <p:nvSpPr>
+          <p:cNvPr id="10" name="正方形/長方形 9"/>
+          <p:cNvSpPr/>
+          <p:nvPr/>
+        </p:nvSpPr>
+        <p:spPr>
+          <a:xfrm>
+            <a:off x="7493000" y="4260055"/>
+            <a:ext cx="4971716" cy="3259680"/>
+          </a:xfrm>
+          <a:prstGeom prst="rect">
+            <a:avLst/>
+          </a:prstGeom>
+        </p:spPr>
+        <p:style>
+          <a:lnRef idx="2">
+            <a:schemeClr val="accent1">
+              <a:shade val="50000"/>
+            </a:schemeClr>
+          </a:lnRef>
+          <a:fillRef idx="1">
+            <a:schemeClr val="accent1"/>
+          </a:fillRef>
+          <a:effectRef idx="0">
+            <a:schemeClr val="accent1"/>
+          </a:effectRef>
+          <a:fontRef idx="minor">
+            <a:schemeClr val="lt1"/>
+          </a:fontRef>
+        </p:style>
+        <p:txBody>
+          <a:bodyPr rtlCol="0" anchor="ctr"/>
+          <a:lstStyle/>
+          <a:p>
+            <a:pPr algn="ctr"/>
+            <a:endParaRPr kumimoji="1" lang="ja-JP" altLang="en-US"/>
+          </a:p>
+        </p:txBody>
+      </p:sp>
+      <p:sp>
+        <p:nvSpPr>
+          <p:cNvPr id="2" name="タイトル 1"/>
+          <p:cNvSpPr>
+            <a:spLocks noGrp="1"/>
+          </p:cNvSpPr>
+          <p:nvPr>
+            <p:ph type="ctrTitle"/>
+          </p:nvPr>
+        </p:nvSpPr>
+        <p:spPr>
+          <a:xfrm>
+            <a:off x="1524000" y="497374"/>
+            <a:ext cx="9144000" cy="2387600"/>
+          </a:xfrm>
+        </p:spPr>
+        <p:txBody>
+          <a:bodyPr>
+            <a:normAutofit/>
+          </a:bodyPr>
+          <a:lstStyle/>
+          <a:p>
+            <a:r>
+              <a:rPr lang="ja-JP" altLang="en-US" sz="9600" b="1" dirty="0">
+                <a:latin typeface="HGS創英角ﾎﾟｯﾌﾟ体" panose="040B0A00000000000000" pitchFamily="50" charset="-128"/>
+                <a:ea typeface="HGS創英角ﾎﾟｯﾌﾟ体" panose="040B0A00000000000000" pitchFamily="50" charset="-128"/>
+              </a:rPr>
+              <a:t>爆チャリ</a:t>
+            </a:r>
+            <a:endParaRPr kumimoji="1" lang="ja-JP" altLang="en-US" sz="9600" b="1" dirty="0">
+              <a:latin typeface="HGS創英角ﾎﾟｯﾌﾟ体" panose="040B0A00000000000000" pitchFamily="50" charset="-128"/>
+              <a:ea typeface="HGS創英角ﾎﾟｯﾌﾟ体" panose="040B0A00000000000000" pitchFamily="50" charset="-128"/>
+            </a:endParaRPr>
+          </a:p>
+        </p:txBody>
+      </p:sp>
+      <p:sp>
+        <p:nvSpPr>
+          <p:cNvPr id="11" name="テキスト ボックス 10"/>
+          <p:cNvSpPr txBox="1"/>
+          <p:nvPr/>
+        </p:nvSpPr>
+        <p:spPr>
+          <a:xfrm>
+            <a:off x="7569959" y="5009424"/>
+            <a:ext cx="4979248" cy="1477328"/>
+          </a:xfrm>
+          <a:prstGeom prst="rect">
+            <a:avLst/>
+          </a:prstGeom>
+          <a:noFill/>
+        </p:spPr>
+        <p:txBody>
+          <a:bodyPr wrap="none" rtlCol="0">
+            <a:spAutoFit/>
+          </a:bodyPr>
+          <a:lstStyle/>
+          <a:p>
+            <a:r>
+              <a:rPr kumimoji="1" lang="ja-JP" altLang="en-US" b="1" dirty="0" smtClean="0">
+                <a:solidFill>
+                  <a:schemeClr val="bg1"/>
+                </a:solidFill>
+              </a:rPr>
+              <a:t>ジャンル：横スクロール２</a:t>
+            </a:r>
+            <a:r>
+              <a:rPr kumimoji="1" lang="en-US" altLang="ja-JP" b="1" dirty="0" smtClean="0">
+                <a:solidFill>
+                  <a:schemeClr val="bg1"/>
+                </a:solidFill>
+              </a:rPr>
+              <a:t>D</a:t>
+            </a:r>
+            <a:r>
+              <a:rPr kumimoji="1" lang="ja-JP" altLang="en-US" b="1" dirty="0" smtClean="0">
+                <a:solidFill>
+                  <a:schemeClr val="bg1"/>
+                </a:solidFill>
+              </a:rPr>
+              <a:t>アクションゲーム</a:t>
+            </a:r>
+            <a:r>
+              <a:rPr kumimoji="1" lang="en-US" altLang="ja-JP" b="1" dirty="0" smtClean="0">
+                <a:solidFill>
+                  <a:schemeClr val="bg1"/>
+                </a:solidFill>
+              </a:rPr>
+              <a:t/>
+            </a:r>
+            <a:br>
+              <a:rPr kumimoji="1" lang="en-US" altLang="ja-JP" b="1" dirty="0" smtClean="0">
+                <a:solidFill>
+                  <a:schemeClr val="bg1"/>
+                </a:solidFill>
+              </a:rPr>
+            </a:br>
+            <a:r>
+              <a:rPr kumimoji="1" lang="en-US" altLang="ja-JP" b="1" dirty="0" smtClean="0">
+                <a:solidFill>
+                  <a:schemeClr val="bg1"/>
+                </a:solidFill>
+              </a:rPr>
+              <a:t/>
+            </a:r>
+            <a:br>
+              <a:rPr kumimoji="1" lang="en-US" altLang="ja-JP" b="1" dirty="0" smtClean="0">
+                <a:solidFill>
+                  <a:schemeClr val="bg1"/>
+                </a:solidFill>
+              </a:rPr>
+            </a:br>
+            <a:r>
+              <a:rPr kumimoji="1" lang="ja-JP" altLang="en-US" b="1" dirty="0" smtClean="0">
+                <a:solidFill>
+                  <a:schemeClr val="bg1"/>
+                </a:solidFill>
+              </a:rPr>
+              <a:t>プレイ人数：</a:t>
+            </a:r>
+            <a:r>
+              <a:rPr kumimoji="1" lang="en-US" altLang="ja-JP" b="1" dirty="0" smtClean="0">
+                <a:solidFill>
+                  <a:schemeClr val="bg1"/>
+                </a:solidFill>
+              </a:rPr>
+              <a:t>1</a:t>
+            </a:r>
+            <a:r>
+              <a:rPr kumimoji="1" lang="ja-JP" altLang="en-US" b="1" dirty="0" smtClean="0">
+                <a:solidFill>
+                  <a:schemeClr val="bg1"/>
+                </a:solidFill>
+              </a:rPr>
+              <a:t>人</a:t>
+            </a:r>
+            <a:endParaRPr kumimoji="1" lang="en-US" altLang="ja-JP" b="1" dirty="0" smtClean="0">
+              <a:solidFill>
+                <a:schemeClr val="bg1"/>
+              </a:solidFill>
+            </a:endParaRPr>
+          </a:p>
+          <a:p>
+            <a:endParaRPr lang="en-US" altLang="ja-JP" b="1" dirty="0">
+              <a:solidFill>
+                <a:schemeClr val="bg1"/>
+              </a:solidFill>
+            </a:endParaRPr>
+          </a:p>
+          <a:p>
+            <a:r>
+              <a:rPr lang="ja-JP" altLang="en-US" b="1" dirty="0">
+                <a:solidFill>
+                  <a:schemeClr val="bg1"/>
+                </a:solidFill>
+              </a:rPr>
+              <a:t>開発</a:t>
+            </a:r>
+            <a:r>
+              <a:rPr lang="ja-JP" altLang="en-US" b="1" dirty="0" smtClean="0">
+                <a:solidFill>
+                  <a:schemeClr val="bg1"/>
+                </a:solidFill>
+              </a:rPr>
+              <a:t>環境：</a:t>
+            </a:r>
+            <a:r>
+              <a:rPr lang="en-US" altLang="ja-JP" b="1" dirty="0" smtClean="0">
+                <a:solidFill>
+                  <a:schemeClr val="bg1"/>
+                </a:solidFill>
+              </a:rPr>
+              <a:t>Unity</a:t>
+            </a:r>
+            <a:endParaRPr kumimoji="1" lang="ja-JP" altLang="en-US" b="1" dirty="0">
+              <a:solidFill>
+                <a:schemeClr val="bg1"/>
+              </a:solidFill>
+            </a:endParaRPr>
+          </a:p>
+        </p:txBody>
+      </p:sp>
+      <p:pic>
+        <p:nvPicPr>
+          <p:cNvPr id="13" name="図 12"/>
+          <p:cNvPicPr>
+            <a:picLocks noChangeAspect="1"/>
+          </p:cNvPicPr>
+          <p:nvPr/>
+        </p:nvPicPr>
+        <p:blipFill>
+          <a:blip r:embed="rId7" cstate="print">
+            <a:extLst>
+              <a:ext uri="{28A0092B-C50C-407E-A947-70E740481C1C}">
+                <a14:useLocalDpi xmlns:a14="http://schemas.microsoft.com/office/drawing/2010/main" val="0"/>
+              </a:ext>
+            </a:extLst>
+          </a:blip>
+          <a:stretch>
+            <a:fillRect/>
+          </a:stretch>
+        </p:blipFill>
+        <p:spPr>
+          <a:xfrm>
+            <a:off x="1420525" y="5208407"/>
+            <a:ext cx="2719675" cy="1649593"/>
           </a:xfrm>
           <a:prstGeom prst="rect">
             <a:avLst/>
@@ -3366,116 +3678,9 @@
           <a:chExt cx="0" cy="0"/>
         </a:xfrm>
       </p:grpSpPr>
-      <p:sp>
-        <p:nvSpPr>
-          <p:cNvPr id="2" name="タイトル 1"/>
-          <p:cNvSpPr>
-            <a:spLocks noGrp="1"/>
-          </p:cNvSpPr>
-          <p:nvPr>
-            <p:ph type="title"/>
-          </p:nvPr>
-        </p:nvSpPr>
-        <p:spPr>
-          <a:xfrm>
-            <a:off x="427140" y="239290"/>
-            <a:ext cx="10515600" cy="1325563"/>
-          </a:xfrm>
-        </p:spPr>
-        <p:txBody>
-          <a:bodyPr>
-            <a:normAutofit/>
-          </a:bodyPr>
-          <a:lstStyle/>
-          <a:p>
-            <a:r>
-              <a:rPr lang="ja-JP" altLang="en-US" sz="5400" b="1" dirty="0"/>
-              <a:t>ゲーム概要</a:t>
-            </a:r>
-          </a:p>
-        </p:txBody>
-      </p:sp>
-      <p:sp>
-        <p:nvSpPr>
-          <p:cNvPr id="3" name="コンテンツ プレースホルダー 2"/>
-          <p:cNvSpPr>
-            <a:spLocks noGrp="1"/>
-          </p:cNvSpPr>
-          <p:nvPr>
-            <p:ph idx="1"/>
-          </p:nvPr>
-        </p:nvSpPr>
-        <p:spPr>
-          <a:xfrm>
-            <a:off x="552974" y="2018572"/>
-            <a:ext cx="10515600" cy="4351338"/>
-          </a:xfrm>
-        </p:spPr>
-        <p:txBody>
-          <a:bodyPr>
-            <a:normAutofit/>
-          </a:bodyPr>
-          <a:lstStyle/>
-          <a:p>
-            <a:pPr marL="0" indent="0">
-              <a:buNone/>
-            </a:pPr>
-            <a:r>
-              <a:rPr kumimoji="1" lang="ja-JP" altLang="en-US" sz="4400" dirty="0"/>
-              <a:t>ジャンル：横スクロール</a:t>
-            </a:r>
-            <a:r>
-              <a:rPr kumimoji="1" lang="en-US" altLang="ja-JP" sz="4400" dirty="0"/>
-              <a:t>2D</a:t>
-            </a:r>
-            <a:r>
-              <a:rPr kumimoji="1" lang="ja-JP" altLang="en-US" sz="4400" dirty="0"/>
-              <a:t>アクション</a:t>
-            </a:r>
-            <a:endParaRPr kumimoji="1" lang="en-US" altLang="ja-JP" sz="4400" dirty="0"/>
-          </a:p>
-          <a:p>
-            <a:pPr marL="0" indent="0">
-              <a:buNone/>
-            </a:pPr>
-            <a:r>
-              <a:rPr kumimoji="1" lang="ja-JP" altLang="en-US" sz="4400" dirty="0"/>
-              <a:t>開発環境：</a:t>
-            </a:r>
-            <a:r>
-              <a:rPr kumimoji="1" lang="en-US" altLang="ja-JP" sz="4400" dirty="0"/>
-              <a:t>Unity</a:t>
-            </a:r>
-          </a:p>
-          <a:p>
-            <a:pPr marL="0" indent="0">
-              <a:buNone/>
-            </a:pPr>
-            <a:r>
-              <a:rPr lang="ja-JP" altLang="en-US" sz="4400" dirty="0"/>
-              <a:t>プレイ人数：</a:t>
-            </a:r>
-            <a:r>
-              <a:rPr lang="en-US" altLang="ja-JP" sz="4400" dirty="0"/>
-              <a:t>1</a:t>
-            </a:r>
-            <a:r>
-              <a:rPr lang="ja-JP" altLang="en-US" sz="4400" dirty="0"/>
-              <a:t>人</a:t>
-            </a:r>
-            <a:endParaRPr lang="en-US" altLang="ja-JP" sz="4400" dirty="0"/>
-          </a:p>
-        </p:txBody>
-      </p:sp>
       <p:pic>
         <p:nvPicPr>
-          <p:cNvPr id="4" name="図 3">
-            <a:extLst>
-              <a:ext uri="{FF2B5EF4-FFF2-40B4-BE49-F238E27FC236}">
-                <a16:creationId xmlns:a16="http://schemas.microsoft.com/office/drawing/2014/main" id="{63BF7E92-96A8-763B-E4D1-C5C9A8B798C3}"/>
-              </a:ext>
-            </a:extLst>
-          </p:cNvPr>
+          <p:cNvPr id="4" name="図 3"/>
           <p:cNvPicPr>
             <a:picLocks noChangeAspect="1"/>
           </p:cNvPicPr>
@@ -3495,31 +3700,157 @@
         </p:blipFill>
         <p:spPr>
           <a:xfrm>
-            <a:off x="9013201" y="3255962"/>
-            <a:ext cx="3178799" cy="3602038"/>
+            <a:off x="0" y="723900"/>
+            <a:ext cx="6014213" cy="3391527"/>
           </a:xfrm>
           <a:prstGeom prst="rect">
             <a:avLst/>
           </a:prstGeom>
         </p:spPr>
       </p:pic>
+      <p:pic>
+        <p:nvPicPr>
+          <p:cNvPr id="5" name="図 4"/>
+          <p:cNvPicPr>
+            <a:picLocks noChangeAspect="1"/>
+          </p:cNvPicPr>
+          <p:nvPr/>
+        </p:nvPicPr>
+        <p:blipFill>
+          <a:blip r:embed="rId3">
+            <a:extLst>
+              <a:ext uri="{28A0092B-C50C-407E-A947-70E740481C1C}">
+                <a14:useLocalDpi xmlns:a14="http://schemas.microsoft.com/office/drawing/2010/main" val="0"/>
+              </a:ext>
+            </a:extLst>
+          </a:blip>
+          <a:stretch>
+            <a:fillRect/>
+          </a:stretch>
+        </p:blipFill>
+        <p:spPr>
+          <a:xfrm>
+            <a:off x="5936868" y="723900"/>
+            <a:ext cx="6255131" cy="3481325"/>
+          </a:xfrm>
+          <a:prstGeom prst="rect">
+            <a:avLst/>
+          </a:prstGeom>
+        </p:spPr>
+      </p:pic>
+      <p:pic>
+        <p:nvPicPr>
+          <p:cNvPr id="6" name="図 5"/>
+          <p:cNvPicPr>
+            <a:picLocks noChangeAspect="1"/>
+          </p:cNvPicPr>
+          <p:nvPr/>
+        </p:nvPicPr>
+        <p:blipFill>
+          <a:blip r:embed="rId4">
+            <a:extLst>
+              <a:ext uri="{28A0092B-C50C-407E-A947-70E740481C1C}">
+                <a14:useLocalDpi xmlns:a14="http://schemas.microsoft.com/office/drawing/2010/main" val="0"/>
+              </a:ext>
+            </a:extLst>
+          </a:blip>
+          <a:stretch>
+            <a:fillRect/>
+          </a:stretch>
+        </p:blipFill>
+        <p:spPr>
+          <a:xfrm>
+            <a:off x="5936868" y="3860800"/>
+            <a:ext cx="6255132" cy="2997200"/>
+          </a:xfrm>
+          <a:prstGeom prst="rect">
+            <a:avLst/>
+          </a:prstGeom>
+        </p:spPr>
+      </p:pic>
+      <p:pic>
+        <p:nvPicPr>
+          <p:cNvPr id="7" name="図 6"/>
+          <p:cNvPicPr>
+            <a:picLocks noChangeAspect="1"/>
+          </p:cNvPicPr>
+          <p:nvPr/>
+        </p:nvPicPr>
+        <p:blipFill>
+          <a:blip r:embed="rId5">
+            <a:extLst>
+              <a:ext uri="{28A0092B-C50C-407E-A947-70E740481C1C}">
+                <a14:useLocalDpi xmlns:a14="http://schemas.microsoft.com/office/drawing/2010/main" val="0"/>
+              </a:ext>
+            </a:extLst>
+          </a:blip>
+          <a:stretch>
+            <a:fillRect/>
+          </a:stretch>
+        </p:blipFill>
+        <p:spPr>
+          <a:xfrm>
+            <a:off x="-25782" y="3860800"/>
+            <a:ext cx="5962650" cy="2997200"/>
+          </a:xfrm>
+          <a:prstGeom prst="rect">
+            <a:avLst/>
+          </a:prstGeom>
+        </p:spPr>
+      </p:pic>
+      <p:sp>
+        <p:nvSpPr>
+          <p:cNvPr id="8" name="正方形/長方形 7"/>
+          <p:cNvSpPr/>
+          <p:nvPr/>
+        </p:nvSpPr>
+        <p:spPr>
+          <a:xfrm>
+            <a:off x="-1" y="0"/>
+            <a:ext cx="12191999" cy="1041400"/>
+          </a:xfrm>
+          <a:prstGeom prst="rect">
+            <a:avLst/>
+          </a:prstGeom>
+        </p:spPr>
+        <p:style>
+          <a:lnRef idx="2">
+            <a:schemeClr val="accent1">
+              <a:shade val="50000"/>
+            </a:schemeClr>
+          </a:lnRef>
+          <a:fillRef idx="1">
+            <a:schemeClr val="accent1"/>
+          </a:fillRef>
+          <a:effectRef idx="0">
+            <a:schemeClr val="accent1"/>
+          </a:effectRef>
+          <a:fontRef idx="minor">
+            <a:schemeClr val="lt1"/>
+          </a:fontRef>
+        </p:style>
+        <p:txBody>
+          <a:bodyPr rtlCol="0" anchor="ctr"/>
+          <a:lstStyle/>
+          <a:p>
+            <a:r>
+              <a:rPr kumimoji="1" lang="ja-JP" altLang="en-US" sz="6000" b="1" dirty="0" smtClean="0"/>
+              <a:t>ステージ</a:t>
+            </a:r>
+            <a:endParaRPr kumimoji="1" lang="ja-JP" altLang="en-US" sz="6000" b="1" dirty="0"/>
+          </a:p>
+        </p:txBody>
+      </p:sp>
     </p:spTree>
     <p:extLst>
       <p:ext uri="{BB962C8B-B14F-4D97-AF65-F5344CB8AC3E}">
-        <p14:creationId xmlns:p14="http://schemas.microsoft.com/office/powerpoint/2010/main" val="1401241664"/>
+        <p14:creationId xmlns:p14="http://schemas.microsoft.com/office/powerpoint/2010/main" val="1760651555"/>
       </p:ext>
     </p:extLst>
   </p:cSld>
   <p:clrMapOvr>
     <a:masterClrMapping/>
   </p:clrMapOvr>
-  <p:timing>
-    <p:tnLst>
-      <p:par>
-        <p:cTn id="1" dur="indefinite" restart="never" nodeType="tmRoot"/>
-      </p:par>
-    </p:tnLst>
-  </p:timing>
 </p:sld>
 </file>
 
@@ -3775,11 +4106,7 @@
           <a:p>
             <a:r>
               <a:rPr lang="ja-JP" altLang="en-US" sz="3600" dirty="0" smtClean="0"/>
-              <a:t>ダッシュを使うことで爆走</a:t>
-            </a:r>
-            <a:r>
-              <a:rPr lang="ja-JP" altLang="en-US" sz="3600" dirty="0" smtClean="0"/>
-              <a:t>できる</a:t>
+              <a:t>ダッシュを使うことで爆走できる</a:t>
             </a:r>
             <a:r>
               <a:rPr lang="ja-JP" altLang="en-US" sz="3600" dirty="0"/>

--- a/爆チャリ.pptx
+++ b/爆チャリ.pptx
@@ -7,8 +7,10 @@
   <p:sldIdLst>
     <p:sldId id="256" r:id="rId2"/>
     <p:sldId id="260" r:id="rId3"/>
-    <p:sldId id="257" r:id="rId4"/>
-    <p:sldId id="259" r:id="rId5"/>
+    <p:sldId id="262" r:id="rId4"/>
+    <p:sldId id="257" r:id="rId5"/>
+    <p:sldId id="259" r:id="rId6"/>
+    <p:sldId id="261" r:id="rId7"/>
   </p:sldIdLst>
   <p:sldSz cx="12192000" cy="6858000"/>
   <p:notesSz cx="6858000" cy="9144000"/>
@@ -2873,7 +2875,7 @@
             </a:lvl1pPr>
           </a:lstStyle>
           <a:p>
-            <a:endParaRPr kumimoji="1" lang="ja-JP" altLang="en-US"/>
+            <a:endParaRPr kumimoji="1" lang="ja-JP" altLang="en-US" dirty="0"/>
           </a:p>
         </p:txBody>
       </p:sp>
@@ -3834,10 +3836,14 @@
           <a:lstStyle/>
           <a:p>
             <a:r>
-              <a:rPr kumimoji="1" lang="ja-JP" altLang="en-US" sz="6000" b="1" dirty="0" smtClean="0"/>
+              <a:rPr kumimoji="1" lang="ja-JP" altLang="en-US" sz="6000" b="1" dirty="0" smtClean="0">
+                <a:latin typeface="+mn-ea"/>
+              </a:rPr>
               <a:t>ステージ</a:t>
             </a:r>
-            <a:endParaRPr kumimoji="1" lang="ja-JP" altLang="en-US" sz="6000" b="1" dirty="0"/>
+            <a:endParaRPr kumimoji="1" lang="ja-JP" altLang="en-US" sz="6000" b="1" dirty="0">
+              <a:latin typeface="+mn-ea"/>
+            </a:endParaRPr>
           </a:p>
         </p:txBody>
       </p:sp>
@@ -3873,119 +3879,54 @@
       </p:grpSpPr>
       <p:sp>
         <p:nvSpPr>
-          <p:cNvPr id="2" name="タイトル 1"/>
-          <p:cNvSpPr>
-            <a:spLocks noGrp="1"/>
-          </p:cNvSpPr>
-          <p:nvPr>
-            <p:ph type="title"/>
-          </p:nvPr>
-        </p:nvSpPr>
-        <p:spPr/>
-        <p:txBody>
-          <a:bodyPr>
-            <a:normAutofit/>
-          </a:bodyPr>
-          <a:lstStyle/>
-          <a:p>
-            <a:r>
-              <a:rPr kumimoji="1" lang="ja-JP" altLang="en-US" sz="5400" b="1" dirty="0"/>
-              <a:t>ゲーム説明</a:t>
-            </a:r>
-          </a:p>
-        </p:txBody>
-      </p:sp>
-      <p:sp>
-        <p:nvSpPr>
-          <p:cNvPr id="3" name="コンテンツ プレースホルダー 2"/>
-          <p:cNvSpPr>
-            <a:spLocks noGrp="1"/>
-          </p:cNvSpPr>
-          <p:nvPr>
-            <p:ph idx="1"/>
-          </p:nvPr>
+          <p:cNvPr id="8" name="正方形/長方形 7"/>
+          <p:cNvSpPr/>
+          <p:nvPr/>
         </p:nvSpPr>
         <p:spPr>
           <a:xfrm>
-            <a:off x="636863" y="1926293"/>
-            <a:ext cx="11082556" cy="4351338"/>
+            <a:off x="0" y="-201335"/>
+            <a:ext cx="12191999" cy="1041400"/>
           </a:xfrm>
+          <a:prstGeom prst="rect">
+            <a:avLst/>
+          </a:prstGeom>
         </p:spPr>
-        <p:txBody>
-          <a:bodyPr>
-            <a:normAutofit/>
-          </a:bodyPr>
-          <a:lstStyle/>
-          <a:p>
-            <a:r>
-              <a:rPr kumimoji="1" lang="ja-JP" altLang="en-US" sz="3200" dirty="0"/>
-              <a:t>自転車に乗りながらゴールを目指す</a:t>
-            </a:r>
-            <a:endParaRPr kumimoji="1" lang="en-US" altLang="ja-JP" sz="3200" dirty="0"/>
-          </a:p>
-          <a:p>
-            <a:r>
-              <a:rPr kumimoji="1" lang="ja-JP" altLang="en-US" sz="3200" dirty="0" smtClean="0"/>
-              <a:t>スタミナを消費してダッシュができる（時間経過で回復）</a:t>
-            </a:r>
-            <a:endParaRPr kumimoji="1" lang="en-US" altLang="ja-JP" sz="3200" dirty="0" smtClean="0"/>
-          </a:p>
-          <a:p>
-            <a:r>
-              <a:rPr lang="ja-JP" altLang="en-US" sz="3200" dirty="0"/>
-              <a:t>スタミナ</a:t>
-            </a:r>
-            <a:r>
-              <a:rPr lang="ja-JP" altLang="en-US" sz="3200" dirty="0" smtClean="0"/>
-              <a:t>が０になると回復するまで操作不能になる</a:t>
-            </a:r>
-            <a:endParaRPr lang="en-US" altLang="ja-JP" sz="3200" dirty="0" smtClean="0"/>
-          </a:p>
-          <a:p>
-            <a:r>
-              <a:rPr lang="ja-JP" altLang="en-US" sz="3200" dirty="0" smtClean="0"/>
-              <a:t>時間制限がありダッシュをうまく使うのが大切</a:t>
-            </a:r>
-            <a:endParaRPr lang="en-US" altLang="ja-JP" sz="3200" dirty="0" smtClean="0"/>
-          </a:p>
-          <a:p>
-            <a:r>
-              <a:rPr kumimoji="1" lang="ja-JP" altLang="en-US" sz="3200" dirty="0" smtClean="0"/>
-              <a:t>プレイヤーが転倒</a:t>
-            </a:r>
-            <a:r>
-              <a:rPr lang="ja-JP" altLang="en-US" sz="3200" dirty="0"/>
-              <a:t>する</a:t>
-            </a:r>
-            <a:r>
-              <a:rPr lang="ja-JP" altLang="en-US" sz="3200" dirty="0" smtClean="0"/>
-              <a:t>と</a:t>
-            </a:r>
-            <a:r>
-              <a:rPr lang="ja-JP" altLang="en-US" sz="3200" dirty="0" smtClean="0">
-                <a:solidFill>
-                  <a:srgbClr val="FF0000"/>
-                </a:solidFill>
+        <p:style>
+          <a:lnRef idx="2">
+            <a:schemeClr val="accent1">
+              <a:shade val="50000"/>
+            </a:schemeClr>
+          </a:lnRef>
+          <a:fillRef idx="1">
+            <a:schemeClr val="accent1"/>
+          </a:fillRef>
+          <a:effectRef idx="0">
+            <a:schemeClr val="accent1"/>
+          </a:effectRef>
+          <a:fontRef idx="minor">
+            <a:schemeClr val="lt1"/>
+          </a:fontRef>
+        </p:style>
+        <p:txBody>
+          <a:bodyPr rtlCol="0" anchor="ctr"/>
+          <a:lstStyle/>
+          <a:p>
+            <a:r>
+              <a:rPr lang="ja-JP" altLang="en-US" sz="4800" b="1" dirty="0">
+                <a:latin typeface="+mn-ea"/>
               </a:rPr>
-              <a:t>ゲームオーバー</a:t>
-            </a:r>
-            <a:r>
-              <a:rPr lang="ja-JP" altLang="en-US" sz="3200" dirty="0" smtClean="0"/>
-              <a:t>になる</a:t>
-            </a:r>
-            <a:endParaRPr lang="en-US" altLang="ja-JP" sz="3200" dirty="0" smtClean="0"/>
+              <a:t>ゲーム画面</a:t>
+            </a:r>
+            <a:endParaRPr kumimoji="1" lang="ja-JP" altLang="en-US" sz="4800" b="1" dirty="0">
+              <a:latin typeface="+mn-ea"/>
+            </a:endParaRPr>
           </a:p>
         </p:txBody>
       </p:sp>
       <p:pic>
         <p:nvPicPr>
-          <p:cNvPr id="4" name="図 3">
-            <a:extLst>
-              <a:ext uri="{FF2B5EF4-FFF2-40B4-BE49-F238E27FC236}">
-                <a16:creationId xmlns:a16="http://schemas.microsoft.com/office/drawing/2014/main" id="{40663752-4E96-B5D5-EAF2-30BBC178937B}"/>
-              </a:ext>
-            </a:extLst>
-          </p:cNvPr>
+          <p:cNvPr id="2" name="図 1"/>
           <p:cNvPicPr>
             <a:picLocks noChangeAspect="1"/>
           </p:cNvPicPr>
@@ -4005,14 +3946,279 @@
         </p:blipFill>
         <p:spPr>
           <a:xfrm>
-            <a:off x="9013201" y="3255962"/>
-            <a:ext cx="3178799" cy="3602038"/>
+            <a:off x="0" y="729842"/>
+            <a:ext cx="12192000" cy="6128158"/>
           </a:xfrm>
           <a:prstGeom prst="rect">
             <a:avLst/>
           </a:prstGeom>
         </p:spPr>
       </p:pic>
+    </p:spTree>
+    <p:extLst>
+      <p:ext uri="{BB962C8B-B14F-4D97-AF65-F5344CB8AC3E}">
+        <p14:creationId xmlns:p14="http://schemas.microsoft.com/office/powerpoint/2010/main" val="2357651606"/>
+      </p:ext>
+    </p:extLst>
+  </p:cSld>
+  <p:clrMapOvr>
+    <a:masterClrMapping/>
+  </p:clrMapOvr>
+</p:sld>
+</file>
+
+<file path=ppt/slides/slide4.xml><?xml version="1.0" encoding="utf-8"?>
+<p:sld xmlns:a="http://schemas.openxmlformats.org/drawingml/2006/main" xmlns:r="http://schemas.openxmlformats.org/officeDocument/2006/relationships" xmlns:p="http://schemas.openxmlformats.org/presentationml/2006/main">
+  <p:cSld>
+    <p:spTree>
+      <p:nvGrpSpPr>
+        <p:cNvPr id="1" name=""/>
+        <p:cNvGrpSpPr/>
+        <p:nvPr/>
+      </p:nvGrpSpPr>
+      <p:grpSpPr>
+        <a:xfrm>
+          <a:off x="0" y="0"/>
+          <a:ext cx="0" cy="0"/>
+          <a:chOff x="0" y="0"/>
+          <a:chExt cx="0" cy="0"/>
+        </a:xfrm>
+      </p:grpSpPr>
+      <p:sp>
+        <p:nvSpPr>
+          <p:cNvPr id="3" name="コンテンツ プレースホルダー 2"/>
+          <p:cNvSpPr>
+            <a:spLocks noGrp="1"/>
+          </p:cNvSpPr>
+          <p:nvPr>
+            <p:ph idx="1"/>
+          </p:nvPr>
+        </p:nvSpPr>
+        <p:spPr>
+          <a:xfrm>
+            <a:off x="440310" y="1849381"/>
+            <a:ext cx="11082556" cy="4351338"/>
+          </a:xfrm>
+        </p:spPr>
+        <p:txBody>
+          <a:bodyPr>
+            <a:normAutofit fontScale="85000" lnSpcReduction="20000"/>
+          </a:bodyPr>
+          <a:lstStyle/>
+          <a:p>
+            <a:r>
+              <a:rPr lang="ja-JP" altLang="en-US" sz="3200" dirty="0"/>
+              <a:t>自転車を操作し、プレイヤーを落とさずにギミック</a:t>
+            </a:r>
+            <a:r>
+              <a:rPr lang="ja-JP" altLang="en-US" sz="3200" dirty="0" smtClean="0"/>
+              <a:t>を</a:t>
+            </a:r>
+            <a:endParaRPr lang="en-US" altLang="ja-JP" sz="3200" dirty="0" smtClean="0"/>
+          </a:p>
+          <a:p>
+            <a:pPr marL="0" indent="0">
+              <a:buNone/>
+            </a:pPr>
+            <a:r>
+              <a:rPr lang="ja-JP" altLang="en-US" sz="3200" dirty="0" smtClean="0"/>
+              <a:t>  突破</a:t>
+            </a:r>
+            <a:r>
+              <a:rPr lang="ja-JP" altLang="en-US" sz="3200" dirty="0"/>
+              <a:t>してゴールを目指すアクションゲーム</a:t>
+            </a:r>
+            <a:r>
+              <a:rPr lang="ja-JP" altLang="en-US" sz="3200" dirty="0" smtClean="0"/>
+              <a:t>。</a:t>
+            </a:r>
+            <a:endParaRPr lang="en-US" altLang="ja-JP" sz="3200" dirty="0" smtClean="0"/>
+          </a:p>
+          <a:p>
+            <a:pPr marL="0" indent="0">
+              <a:buNone/>
+            </a:pPr>
+            <a:endParaRPr lang="en-US" altLang="ja-JP" sz="3200" dirty="0"/>
+          </a:p>
+          <a:p>
+            <a:r>
+              <a:rPr lang="ja-JP" altLang="en-US" sz="3200" dirty="0"/>
+              <a:t>プレイヤーがゴールラインを越える</a:t>
+            </a:r>
+            <a:r>
+              <a:rPr lang="ja-JP" altLang="en-US" sz="3200" dirty="0" smtClean="0"/>
+              <a:t>とクリア</a:t>
+            </a:r>
+            <a:r>
+              <a:rPr lang="ja-JP" altLang="en-US" sz="3200" dirty="0"/>
+              <a:t>となり</a:t>
+            </a:r>
+            <a:r>
+              <a:rPr lang="ja-JP" altLang="en-US" sz="3200" dirty="0" smtClean="0"/>
+              <a:t>、</a:t>
+            </a:r>
+            <a:endParaRPr lang="en-US" altLang="ja-JP" sz="3200" dirty="0" smtClean="0"/>
+          </a:p>
+          <a:p>
+            <a:pPr marL="0" indent="0">
+              <a:buNone/>
+            </a:pPr>
+            <a:r>
+              <a:rPr lang="en-US" altLang="ja-JP" sz="3200" dirty="0"/>
+              <a:t> </a:t>
+            </a:r>
+            <a:r>
+              <a:rPr lang="en-US" altLang="ja-JP" sz="3200" dirty="0" smtClean="0"/>
+              <a:t> </a:t>
+            </a:r>
+            <a:r>
+              <a:rPr lang="ja-JP" altLang="en-US" sz="3200" dirty="0" smtClean="0"/>
+              <a:t>赤い</a:t>
+            </a:r>
+            <a:r>
+              <a:rPr lang="ja-JP" altLang="en-US" sz="3200" dirty="0"/>
+              <a:t>床や天井に触れる</a:t>
+            </a:r>
+            <a:r>
+              <a:rPr lang="ja-JP" altLang="en-US" sz="3200" dirty="0" smtClean="0"/>
+              <a:t>、プレイヤー</a:t>
+            </a:r>
+            <a:r>
+              <a:rPr lang="ja-JP" altLang="en-US" sz="3200" dirty="0"/>
+              <a:t>が落下する、</a:t>
+            </a:r>
+            <a:endParaRPr lang="en-US" altLang="ja-JP" sz="3200" dirty="0"/>
+          </a:p>
+          <a:p>
+            <a:pPr marL="0" indent="0">
+              <a:buNone/>
+            </a:pPr>
+            <a:r>
+              <a:rPr lang="ja-JP" altLang="en-US" sz="3200" dirty="0" smtClean="0"/>
+              <a:t>  また</a:t>
+            </a:r>
+            <a:r>
+              <a:rPr lang="ja-JP" altLang="en-US" sz="3200" dirty="0"/>
+              <a:t>は時間切れになるとゲームオーバーとなる</a:t>
+            </a:r>
+            <a:r>
+              <a:rPr lang="ja-JP" altLang="en-US" sz="3200" dirty="0" smtClean="0"/>
+              <a:t>。</a:t>
+            </a:r>
+            <a:endParaRPr lang="en-US" altLang="ja-JP" sz="3200" dirty="0" smtClean="0"/>
+          </a:p>
+          <a:p>
+            <a:pPr marL="0" indent="0">
+              <a:buNone/>
+            </a:pPr>
+            <a:endParaRPr lang="en-US" altLang="ja-JP" sz="3200" dirty="0" smtClean="0"/>
+          </a:p>
+          <a:p>
+            <a:r>
+              <a:rPr lang="ja-JP" altLang="en-US" sz="3200" dirty="0" smtClean="0"/>
+              <a:t>ダッシュ</a:t>
+            </a:r>
+            <a:r>
+              <a:rPr lang="ja-JP" altLang="en-US" sz="3200" dirty="0"/>
+              <a:t>はスタミナを消費する</a:t>
+            </a:r>
+            <a:endParaRPr lang="en-US" altLang="ja-JP" sz="3200" dirty="0"/>
+          </a:p>
+          <a:p>
+            <a:pPr marL="0" indent="0">
+              <a:buNone/>
+            </a:pPr>
+            <a:r>
+              <a:rPr lang="ja-JP" altLang="en-US" sz="3200" dirty="0"/>
+              <a:t> </a:t>
+            </a:r>
+            <a:r>
+              <a:rPr lang="ja-JP" altLang="en-US" sz="3200" dirty="0" smtClean="0"/>
+              <a:t> スタミナ</a:t>
+            </a:r>
+            <a:r>
+              <a:rPr lang="ja-JP" altLang="en-US" sz="3200" dirty="0"/>
+              <a:t>は時間経過で少しずつ回復する</a:t>
+            </a:r>
+            <a:endParaRPr lang="en-US" altLang="ja-JP" sz="3200" dirty="0"/>
+          </a:p>
+          <a:p>
+            <a:pPr marL="0" indent="0">
+              <a:buNone/>
+            </a:pPr>
+            <a:r>
+              <a:rPr lang="ja-JP" altLang="en-US" sz="3200" dirty="0" smtClean="0"/>
+              <a:t>  スタミナ</a:t>
+            </a:r>
+            <a:r>
+              <a:rPr lang="ja-JP" altLang="en-US" sz="3200" dirty="0"/>
+              <a:t>が０になると全回復するまで操作ができなくなる</a:t>
+            </a:r>
+          </a:p>
+          <a:p>
+            <a:pPr marL="0" indent="0">
+              <a:buNone/>
+            </a:pPr>
+            <a:endParaRPr lang="ja-JP" altLang="en-US" sz="3200" dirty="0"/>
+          </a:p>
+          <a:p>
+            <a:endParaRPr lang="en-US" altLang="ja-JP" sz="3200" dirty="0"/>
+          </a:p>
+          <a:p>
+            <a:endParaRPr lang="en-US" altLang="ja-JP" sz="3200" dirty="0"/>
+          </a:p>
+        </p:txBody>
+      </p:sp>
+      <p:sp>
+        <p:nvSpPr>
+          <p:cNvPr id="2" name="タイトル 1"/>
+          <p:cNvSpPr>
+            <a:spLocks noGrp="1"/>
+          </p:cNvSpPr>
+          <p:nvPr>
+            <p:ph type="title"/>
+          </p:nvPr>
+        </p:nvSpPr>
+        <p:spPr>
+          <a:xfrm>
+            <a:off x="0" y="1"/>
+            <a:ext cx="12192000" cy="1345924"/>
+          </a:xfrm>
+        </p:spPr>
+        <p:style>
+          <a:lnRef idx="2">
+            <a:schemeClr val="accent1">
+              <a:shade val="50000"/>
+            </a:schemeClr>
+          </a:lnRef>
+          <a:fillRef idx="1">
+            <a:schemeClr val="accent1"/>
+          </a:fillRef>
+          <a:effectRef idx="0">
+            <a:schemeClr val="accent1"/>
+          </a:effectRef>
+          <a:fontRef idx="minor">
+            <a:schemeClr val="lt1"/>
+          </a:fontRef>
+        </p:style>
+        <p:txBody>
+          <a:bodyPr rtlCol="0" anchor="ctr"/>
+          <a:lstStyle/>
+          <a:p>
+            <a:r>
+              <a:rPr lang="ja-JP" altLang="en-US" sz="6000" b="1" dirty="0">
+                <a:solidFill>
+                  <a:schemeClr val="lt1"/>
+                </a:solidFill>
+                <a:latin typeface="+mn-ea"/>
+                <a:ea typeface="+mn-ea"/>
+                <a:cs typeface="+mn-cs"/>
+              </a:rPr>
+              <a:t>ゲーム説明</a:t>
+            </a:r>
+          </a:p>
+        </p:txBody>
+      </p:sp>
     </p:spTree>
     <p:extLst>
       <p:ext uri="{BB962C8B-B14F-4D97-AF65-F5344CB8AC3E}">
@@ -4033,7 +4239,7 @@
 </p:sld>
 </file>
 
-<file path=ppt/slides/slide4.xml><?xml version="1.0" encoding="utf-8"?>
+<file path=ppt/slides/slide5.xml><?xml version="1.0" encoding="utf-8"?>
 <p:sld xmlns:a="http://schemas.openxmlformats.org/drawingml/2006/main" xmlns:r="http://schemas.openxmlformats.org/officeDocument/2006/relationships" xmlns:p="http://schemas.openxmlformats.org/presentationml/2006/main">
   <p:cSld>
     <p:spTree>
@@ -4060,18 +4266,51 @@
             <p:ph type="title"/>
           </p:nvPr>
         </p:nvSpPr>
-        <p:spPr/>
-        <p:txBody>
-          <a:bodyPr>
-            <a:normAutofit/>
-          </a:bodyPr>
-          <a:lstStyle/>
-          <a:p>
-            <a:r>
-              <a:rPr kumimoji="1" lang="ja-JP" altLang="en-US" sz="5400" b="1" dirty="0" smtClean="0"/>
+        <p:spPr>
+          <a:xfrm>
+            <a:off x="0" y="0"/>
+            <a:ext cx="12192000" cy="1325563"/>
+          </a:xfrm>
+        </p:spPr>
+        <p:style>
+          <a:lnRef idx="2">
+            <a:schemeClr val="accent1">
+              <a:shade val="50000"/>
+            </a:schemeClr>
+          </a:lnRef>
+          <a:fillRef idx="1">
+            <a:schemeClr val="accent1"/>
+          </a:fillRef>
+          <a:effectRef idx="0">
+            <a:schemeClr val="accent1"/>
+          </a:effectRef>
+          <a:fontRef idx="minor">
+            <a:schemeClr val="lt1"/>
+          </a:fontRef>
+        </p:style>
+        <p:txBody>
+          <a:bodyPr rtlCol="0" anchor="ctr"/>
+          <a:lstStyle/>
+          <a:p>
+            <a:r>
+              <a:rPr lang="ja-JP" altLang="en-US" sz="6000" b="1" dirty="0">
+                <a:solidFill>
+                  <a:schemeClr val="lt1"/>
+                </a:solidFill>
+                <a:latin typeface="+mn-ea"/>
+                <a:ea typeface="+mn-ea"/>
+                <a:cs typeface="+mn-cs"/>
+              </a:rPr>
               <a:t>面白い点</a:t>
             </a:r>
-            <a:endParaRPr kumimoji="1" lang="ja-JP" altLang="en-US" sz="5400" b="1" dirty="0"/>
+            <a:endParaRPr lang="ja-JP" altLang="en-US" sz="6000" b="1" dirty="0">
+              <a:solidFill>
+                <a:schemeClr val="lt1"/>
+              </a:solidFill>
+              <a:latin typeface="+mn-ea"/>
+              <a:ea typeface="+mn-ea"/>
+              <a:cs typeface="+mn-cs"/>
+            </a:endParaRPr>
           </a:p>
         </p:txBody>
       </p:sp>
@@ -4176,6 +4415,201 @@
       </p:par>
     </p:tnLst>
   </p:timing>
+</p:sld>
+</file>
+
+<file path=ppt/slides/slide6.xml><?xml version="1.0" encoding="utf-8"?>
+<p:sld xmlns:a="http://schemas.openxmlformats.org/drawingml/2006/main" xmlns:r="http://schemas.openxmlformats.org/officeDocument/2006/relationships" xmlns:p="http://schemas.openxmlformats.org/presentationml/2006/main">
+  <p:cSld>
+    <p:spTree>
+      <p:nvGrpSpPr>
+        <p:cNvPr id="1" name=""/>
+        <p:cNvGrpSpPr/>
+        <p:nvPr/>
+      </p:nvGrpSpPr>
+      <p:grpSpPr>
+        <a:xfrm>
+          <a:off x="0" y="0"/>
+          <a:ext cx="0" cy="0"/>
+          <a:chOff x="0" y="0"/>
+          <a:chExt cx="0" cy="0"/>
+        </a:xfrm>
+      </p:grpSpPr>
+      <p:sp>
+        <p:nvSpPr>
+          <p:cNvPr id="4" name="タイトル 1"/>
+          <p:cNvSpPr>
+            <a:spLocks noGrp="1"/>
+          </p:cNvSpPr>
+          <p:nvPr>
+            <p:ph type="title"/>
+          </p:nvPr>
+        </p:nvSpPr>
+        <p:spPr>
+          <a:xfrm>
+            <a:off x="0" y="4501"/>
+            <a:ext cx="12192000" cy="1325563"/>
+          </a:xfrm>
+        </p:spPr>
+        <p:style>
+          <a:lnRef idx="2">
+            <a:schemeClr val="accent1">
+              <a:shade val="50000"/>
+            </a:schemeClr>
+          </a:lnRef>
+          <a:fillRef idx="1">
+            <a:schemeClr val="accent1"/>
+          </a:fillRef>
+          <a:effectRef idx="0">
+            <a:schemeClr val="accent1"/>
+          </a:effectRef>
+          <a:fontRef idx="minor">
+            <a:schemeClr val="lt1"/>
+          </a:fontRef>
+        </p:style>
+        <p:txBody>
+          <a:bodyPr rtlCol="0" anchor="ctr"/>
+          <a:lstStyle/>
+          <a:p>
+            <a:r>
+              <a:rPr lang="ja-JP" altLang="en-US" sz="6000" b="1" dirty="0">
+                <a:solidFill>
+                  <a:schemeClr val="lt1"/>
+                </a:solidFill>
+                <a:latin typeface="+mn-ea"/>
+                <a:ea typeface="+mn-ea"/>
+                <a:cs typeface="+mn-cs"/>
+              </a:rPr>
+              <a:t>操作</a:t>
+            </a:r>
+            <a:r>
+              <a:rPr lang="ja-JP" altLang="en-US" sz="6000" b="1" dirty="0" smtClean="0">
+                <a:solidFill>
+                  <a:schemeClr val="lt1"/>
+                </a:solidFill>
+                <a:latin typeface="+mn-ea"/>
+                <a:ea typeface="+mn-ea"/>
+                <a:cs typeface="+mn-cs"/>
+              </a:rPr>
+              <a:t>方法</a:t>
+            </a:r>
+            <a:endParaRPr lang="ja-JP" altLang="en-US" sz="6000" b="1" dirty="0">
+              <a:solidFill>
+                <a:schemeClr val="lt1"/>
+              </a:solidFill>
+              <a:latin typeface="+mn-ea"/>
+              <a:ea typeface="+mn-ea"/>
+              <a:cs typeface="+mn-cs"/>
+            </a:endParaRPr>
+          </a:p>
+        </p:txBody>
+      </p:sp>
+      <p:sp>
+        <p:nvSpPr>
+          <p:cNvPr id="5" name="テキスト ボックス 4"/>
+          <p:cNvSpPr txBox="1"/>
+          <p:nvPr/>
+        </p:nvSpPr>
+        <p:spPr>
+          <a:xfrm>
+            <a:off x="571500" y="2041066"/>
+            <a:ext cx="11049000" cy="4585871"/>
+          </a:xfrm>
+          <a:prstGeom prst="rect">
+            <a:avLst/>
+          </a:prstGeom>
+          <a:noFill/>
+        </p:spPr>
+        <p:txBody>
+          <a:bodyPr wrap="square" rtlCol="0">
+            <a:spAutoFit/>
+          </a:bodyPr>
+          <a:lstStyle/>
+          <a:p>
+            <a:r>
+              <a:rPr lang="en-US" altLang="ja-JP" sz="4400" dirty="0"/>
+              <a:t>W</a:t>
+            </a:r>
+            <a:r>
+              <a:rPr lang="ja-JP" altLang="en-US" sz="4400" dirty="0"/>
+              <a:t>：前進</a:t>
+            </a:r>
+            <a:endParaRPr lang="en-US" altLang="ja-JP" sz="4400" dirty="0"/>
+          </a:p>
+          <a:p>
+            <a:r>
+              <a:rPr lang="en-US" altLang="ja-JP" sz="4400" dirty="0" smtClean="0"/>
+              <a:t>S </a:t>
+            </a:r>
+            <a:r>
+              <a:rPr lang="ja-JP" altLang="en-US" sz="4400" dirty="0" smtClean="0"/>
+              <a:t>：後退</a:t>
+            </a:r>
+            <a:endParaRPr lang="en-US" altLang="ja-JP" sz="4400" dirty="0" smtClean="0"/>
+          </a:p>
+          <a:p>
+            <a:r>
+              <a:rPr lang="en-US" altLang="ja-JP" sz="4400" dirty="0" smtClean="0"/>
+              <a:t>D</a:t>
+            </a:r>
+            <a:r>
+              <a:rPr lang="ja-JP" altLang="en-US" sz="4400" dirty="0" smtClean="0"/>
+              <a:t>：</a:t>
+            </a:r>
+            <a:r>
+              <a:rPr lang="ja-JP" altLang="en-US" sz="4400" dirty="0"/>
+              <a:t>右回転</a:t>
+            </a:r>
+            <a:endParaRPr lang="en-US" altLang="ja-JP" sz="4400" dirty="0"/>
+          </a:p>
+          <a:p>
+            <a:r>
+              <a:rPr lang="en-US" altLang="ja-JP" sz="4400" dirty="0" smtClean="0"/>
+              <a:t>A</a:t>
+            </a:r>
+            <a:r>
+              <a:rPr lang="ja-JP" altLang="en-US" sz="4400" dirty="0" smtClean="0"/>
+              <a:t>：左回転</a:t>
+            </a:r>
+            <a:endParaRPr lang="en-US" altLang="ja-JP" sz="4400" dirty="0" smtClean="0"/>
+          </a:p>
+          <a:p>
+            <a:r>
+              <a:rPr lang="en-US" altLang="ja-JP" sz="4400" dirty="0"/>
+              <a:t>Shift</a:t>
+            </a:r>
+            <a:r>
+              <a:rPr lang="ja-JP" altLang="en-US" sz="4400" dirty="0" smtClean="0"/>
+              <a:t>：加速</a:t>
+            </a:r>
+            <a:endParaRPr lang="en-US" altLang="ja-JP" sz="4400" dirty="0" smtClean="0"/>
+          </a:p>
+          <a:p>
+            <a:r>
+              <a:rPr lang="en-US" altLang="ja-JP" sz="4400" dirty="0" smtClean="0"/>
+              <a:t>R</a:t>
+            </a:r>
+            <a:r>
+              <a:rPr lang="ja-JP" altLang="en-US" sz="4400" dirty="0" smtClean="0"/>
+              <a:t>：リスタート</a:t>
+            </a:r>
+            <a:endParaRPr lang="en-US" altLang="ja-JP" sz="4400" dirty="0" smtClean="0"/>
+          </a:p>
+          <a:p>
+            <a:endParaRPr lang="en-US" altLang="ja-JP" sz="2800" dirty="0"/>
+          </a:p>
+        </p:txBody>
+      </p:sp>
+    </p:spTree>
+    <p:extLst>
+      <p:ext uri="{BB962C8B-B14F-4D97-AF65-F5344CB8AC3E}">
+        <p14:creationId xmlns:p14="http://schemas.microsoft.com/office/powerpoint/2010/main" val="2709984435"/>
+      </p:ext>
+    </p:extLst>
+  </p:cSld>
+  <p:clrMapOvr>
+    <a:masterClrMapping/>
+  </p:clrMapOvr>
 </p:sld>
 </file>
 
